--- a/海上风电多算法智能体系统_汇报 .pptx
+++ b/海上风电多算法智能体系统_汇报 .pptx
@@ -20,11 +20,12 @@
     <p:sldId id="265" r:id="rId13"/>
     <p:sldId id="266" r:id="rId14"/>
     <p:sldId id="267" r:id="rId15"/>
-    <p:sldId id="268" r:id="rId16"/>
-    <p:sldId id="269" r:id="rId17"/>
-    <p:sldId id="270" r:id="rId18"/>
-    <p:sldId id="271" r:id="rId19"/>
-    <p:sldId id="272" r:id="rId20"/>
+    <p:sldId id="275" r:id="rId16"/>
+    <p:sldId id="268" r:id="rId17"/>
+    <p:sldId id="269" r:id="rId18"/>
+    <p:sldId id="270" r:id="rId19"/>
+    <p:sldId id="271" r:id="rId20"/>
+    <p:sldId id="272" r:id="rId21"/>
   </p:sldIdLst>
   <p:sldSz cx="9144000" cy="5143500"/>
   <p:notesSz cx="5143500" cy="9144000"/>
@@ -1095,6 +1096,84 @@
 </file>
 
 <file path=ppt/notesSlides/notesSlide17.xml><?xml version="1.0" encoding="utf-8"?>
+<p:notes xmlns:a="http://schemas.openxmlformats.org/drawingml/2006/main" xmlns:r="http://schemas.openxmlformats.org/officeDocument/2006/relationships" xmlns:p="http://schemas.openxmlformats.org/presentationml/2006/main">
+  <p:cSld>
+    <p:spTree>
+      <p:nvGrpSpPr>
+        <p:cNvPr id="1" name=""/>
+        <p:cNvGrpSpPr/>
+        <p:nvPr/>
+      </p:nvGrpSpPr>
+      <p:grpSpPr>
+        <a:xfrm>
+          <a:off x="0" y="0"/>
+          <a:ext cx="0" cy="0"/>
+          <a:chOff x="0" y="0"/>
+          <a:chExt cx="0" cy="0"/>
+        </a:xfrm>
+      </p:grpSpPr>
+      <p:sp>
+        <p:nvSpPr>
+          <p:cNvPr id="2" name="Slide Image Placeholder 1"/>
+          <p:cNvSpPr>
+            <a:spLocks noGrp="1" noRot="1" noChangeAspect="1"/>
+          </p:cNvSpPr>
+          <p:nvPr>
+            <p:ph type="sldImg"/>
+          </p:nvPr>
+        </p:nvSpPr>
+        <p:spPr/>
+      </p:sp>
+      <p:sp>
+        <p:nvSpPr>
+          <p:cNvPr id="3" name="Notes Placeholder 2"/>
+          <p:cNvSpPr>
+            <a:spLocks noGrp="1"/>
+          </p:cNvSpPr>
+          <p:nvPr>
+            <p:ph type="body" idx="1"/>
+          </p:nvPr>
+        </p:nvSpPr>
+        <p:spPr/>
+        <p:txBody>
+          <a:bodyPr/>
+          <a:lstStyle/>
+          <a:p>
+            <a:endParaRPr lang="en-US" dirty="0"/>
+          </a:p>
+        </p:txBody>
+      </p:sp>
+      <p:sp>
+        <p:nvSpPr>
+          <p:cNvPr id="4" name="Slide Number Placeholder 3"/>
+          <p:cNvSpPr>
+            <a:spLocks noGrp="1"/>
+          </p:cNvSpPr>
+          <p:nvPr>
+            <p:ph type="sldNum" sz="quarter" idx="10"/>
+          </p:nvPr>
+        </p:nvSpPr>
+        <p:spPr/>
+        <p:txBody>
+          <a:bodyPr/>
+          <a:lstStyle/>
+          <a:p>
+            <a:fld id="{F7021451-1387-4CA6-816F-3879F97B5CBC}" type="slidenum">
+              <a:rPr lang="en-US"/>
+            </a:fld>
+            <a:endParaRPr lang="en-US"/>
+          </a:p>
+        </p:txBody>
+      </p:sp>
+    </p:spTree>
+  </p:cSld>
+  <p:clrMapOvr>
+    <a:masterClrMapping/>
+  </p:clrMapOvr>
+</p:notes>
+</file>
+
+<file path=ppt/notesSlides/notesSlide18.xml><?xml version="1.0" encoding="utf-8"?>
 <p:notes xmlns:a="http://schemas.openxmlformats.org/drawingml/2006/main" xmlns:r="http://schemas.openxmlformats.org/officeDocument/2006/relationships" xmlns:p="http://schemas.openxmlformats.org/presentationml/2006/main">
   <p:cSld>
     <p:spTree>
@@ -4810,7 +4889,7 @@
         <p:spPr>
           <a:xfrm>
             <a:off x="365760" y="2926080"/>
-            <a:ext cx="2697480" cy="1691640"/>
+            <a:ext cx="2052955" cy="1691640"/>
           </a:xfrm>
           <a:prstGeom prst="rect">
             <a:avLst/>
@@ -4836,7 +4915,7 @@
         <p:spPr>
           <a:xfrm>
             <a:off x="365760" y="2926080"/>
-            <a:ext cx="54864" cy="1691640"/>
+            <a:ext cx="76200" cy="1691640"/>
           </a:xfrm>
           <a:prstGeom prst="rect">
             <a:avLst/>
@@ -4855,7 +4934,7 @@
         <p:spPr>
           <a:xfrm>
             <a:off x="365760" y="2926080"/>
-            <a:ext cx="2697480" cy="411480"/>
+            <a:ext cx="2052955" cy="411480"/>
           </a:xfrm>
           <a:prstGeom prst="rect">
             <a:avLst/>
@@ -4874,7 +4953,7 @@
         <p:spPr>
           <a:xfrm>
             <a:off x="365760" y="2926080"/>
-            <a:ext cx="2697480" cy="411480"/>
+            <a:ext cx="2052955" cy="411480"/>
           </a:xfrm>
           <a:prstGeom prst="rect">
             <a:avLst/>
@@ -4912,7 +4991,7 @@
         <p:spPr>
           <a:xfrm>
             <a:off x="502920" y="3429000"/>
-            <a:ext cx="2423160" cy="228600"/>
+            <a:ext cx="1844675" cy="228600"/>
           </a:xfrm>
           <a:prstGeom prst="rect">
             <a:avLst/>
@@ -4950,7 +5029,7 @@
         <p:spPr>
           <a:xfrm>
             <a:off x="502920" y="3703320"/>
-            <a:ext cx="2423160" cy="777240"/>
+            <a:ext cx="1844675" cy="777240"/>
           </a:xfrm>
           <a:prstGeom prst="rect">
             <a:avLst/>
@@ -5004,8 +5083,8 @@
         </p:nvSpPr>
         <p:spPr>
           <a:xfrm>
-            <a:off x="3246120" y="2926080"/>
-            <a:ext cx="2697480" cy="1691640"/>
+            <a:off x="2579370" y="2926080"/>
+            <a:ext cx="1998345" cy="1691640"/>
           </a:xfrm>
           <a:prstGeom prst="rect">
             <a:avLst/>
@@ -5030,8 +5109,8 @@
         </p:nvSpPr>
         <p:spPr>
           <a:xfrm>
-            <a:off x="3246120" y="2926080"/>
-            <a:ext cx="54864" cy="1691640"/>
+            <a:off x="2579370" y="2926080"/>
+            <a:ext cx="84455" cy="1691640"/>
           </a:xfrm>
           <a:prstGeom prst="rect">
             <a:avLst/>
@@ -5049,8 +5128,8 @@
         </p:nvSpPr>
         <p:spPr>
           <a:xfrm>
-            <a:off x="3246120" y="2926080"/>
-            <a:ext cx="2697480" cy="411480"/>
+            <a:off x="2579370" y="2926080"/>
+            <a:ext cx="1998345" cy="411480"/>
           </a:xfrm>
           <a:prstGeom prst="rect">
             <a:avLst/>
@@ -5068,8 +5147,8 @@
         </p:nvSpPr>
         <p:spPr>
           <a:xfrm>
-            <a:off x="3246120" y="2926080"/>
-            <a:ext cx="2697480" cy="411480"/>
+            <a:off x="2579370" y="2926080"/>
+            <a:ext cx="1998345" cy="411480"/>
           </a:xfrm>
           <a:prstGeom prst="rect">
             <a:avLst/>
@@ -5106,8 +5185,8 @@
         </p:nvSpPr>
         <p:spPr>
           <a:xfrm>
-            <a:off x="3383280" y="3429000"/>
-            <a:ext cx="2423160" cy="228600"/>
+            <a:off x="2716530" y="3429000"/>
+            <a:ext cx="1795145" cy="228600"/>
           </a:xfrm>
           <a:prstGeom prst="rect">
             <a:avLst/>
@@ -5144,8 +5223,8 @@
         </p:nvSpPr>
         <p:spPr>
           <a:xfrm>
-            <a:off x="3383280" y="3703320"/>
-            <a:ext cx="2423160" cy="777240"/>
+            <a:off x="2716530" y="3703320"/>
+            <a:ext cx="1795145" cy="777240"/>
           </a:xfrm>
           <a:prstGeom prst="rect">
             <a:avLst/>
@@ -5214,8 +5293,8 @@
         </p:nvSpPr>
         <p:spPr>
           <a:xfrm>
-            <a:off x="6126480" y="2926080"/>
-            <a:ext cx="2697480" cy="1691640"/>
+            <a:off x="4759960" y="2926080"/>
+            <a:ext cx="1913255" cy="1691640"/>
           </a:xfrm>
           <a:prstGeom prst="rect">
             <a:avLst/>
@@ -5240,8 +5319,8 @@
         </p:nvSpPr>
         <p:spPr>
           <a:xfrm>
-            <a:off x="6126480" y="2926080"/>
-            <a:ext cx="54864" cy="1691640"/>
+            <a:off x="4759960" y="2926080"/>
+            <a:ext cx="87630" cy="1691640"/>
           </a:xfrm>
           <a:prstGeom prst="rect">
             <a:avLst/>
@@ -5259,8 +5338,8 @@
         </p:nvSpPr>
         <p:spPr>
           <a:xfrm>
-            <a:off x="6126480" y="2926080"/>
-            <a:ext cx="2697480" cy="411480"/>
+            <a:off x="4759960" y="2926080"/>
+            <a:ext cx="1913255" cy="411480"/>
           </a:xfrm>
           <a:prstGeom prst="rect">
             <a:avLst/>
@@ -5278,8 +5357,8 @@
         </p:nvSpPr>
         <p:spPr>
           <a:xfrm>
-            <a:off x="6126480" y="2926080"/>
-            <a:ext cx="2697480" cy="411480"/>
+            <a:off x="4759960" y="2926080"/>
+            <a:ext cx="1913255" cy="411480"/>
           </a:xfrm>
           <a:prstGeom prst="rect">
             <a:avLst/>
@@ -5316,8 +5395,8 @@
         </p:nvSpPr>
         <p:spPr>
           <a:xfrm>
-            <a:off x="6263640" y="3429000"/>
-            <a:ext cx="2423160" cy="228600"/>
+            <a:off x="4897120" y="3429000"/>
+            <a:ext cx="1719580" cy="228600"/>
           </a:xfrm>
           <a:prstGeom prst="rect">
             <a:avLst/>
@@ -5354,8 +5433,8 @@
         </p:nvSpPr>
         <p:spPr>
           <a:xfrm>
-            <a:off x="6263640" y="3703320"/>
-            <a:ext cx="2423160" cy="777240"/>
+            <a:off x="4897120" y="3703320"/>
+            <a:ext cx="1719580" cy="777240"/>
           </a:xfrm>
           <a:prstGeom prst="rect">
             <a:avLst/>
@@ -5520,6 +5599,254 @@
               <a:t>算法演进: 固定规则 → 启发式 → 遗传算法 → Q-Learning(2139) → DQN(2378)。DQN较基线(积极并网=1179)提升+101%, 事故率仅0.39%, 实现收益与安全的最佳平衡。</a:t>
             </a:r>
             <a:endParaRPr lang="en-US" sz="1000" dirty="0"/>
+          </a:p>
+        </p:txBody>
+      </p:sp>
+      <p:sp>
+        <p:nvSpPr>
+          <p:cNvPr id="45" name="Shape 31"/>
+          <p:cNvSpPr/>
+          <p:nvPr/>
+        </p:nvSpPr>
+        <p:spPr>
+          <a:xfrm>
+            <a:off x="6910705" y="2926080"/>
+            <a:ext cx="1913255" cy="1691640"/>
+          </a:xfrm>
+          <a:prstGeom prst="rect">
+            <a:avLst/>
+          </a:prstGeom>
+          <a:solidFill>
+            <a:srgbClr val="FFFFFF"/>
+          </a:solidFill>
+          <a:effectLst>
+            <a:outerShdw blurRad="50800" dist="25400" dir="8100000" algn="bl" rotWithShape="0">
+              <a:srgbClr val="000000">
+                <a:alpha val="8000"/>
+              </a:srgbClr>
+            </a:outerShdw>
+          </a:effectLst>
+        </p:spPr>
+      </p:sp>
+      <p:sp>
+        <p:nvSpPr>
+          <p:cNvPr id="46" name="Shape 32"/>
+          <p:cNvSpPr/>
+          <p:nvPr/>
+        </p:nvSpPr>
+        <p:spPr>
+          <a:xfrm>
+            <a:off x="6910705" y="2926080"/>
+            <a:ext cx="87630" cy="1691640"/>
+          </a:xfrm>
+          <a:prstGeom prst="rect">
+            <a:avLst/>
+          </a:prstGeom>
+          <a:solidFill>
+            <a:schemeClr val="accent1"/>
+          </a:solidFill>
+        </p:spPr>
+      </p:sp>
+      <p:sp>
+        <p:nvSpPr>
+          <p:cNvPr id="47" name="Shape 33"/>
+          <p:cNvSpPr/>
+          <p:nvPr/>
+        </p:nvSpPr>
+        <p:spPr>
+          <a:xfrm>
+            <a:off x="6910705" y="2926080"/>
+            <a:ext cx="1913255" cy="411480"/>
+          </a:xfrm>
+          <a:prstGeom prst="rect">
+            <a:avLst/>
+          </a:prstGeom>
+          <a:solidFill>
+            <a:schemeClr val="accent1"/>
+          </a:solidFill>
+        </p:spPr>
+      </p:sp>
+      <p:sp>
+        <p:nvSpPr>
+          <p:cNvPr id="48" name="Text 34"/>
+          <p:cNvSpPr/>
+          <p:nvPr/>
+        </p:nvSpPr>
+        <p:spPr>
+          <a:xfrm>
+            <a:off x="6910705" y="2926080"/>
+            <a:ext cx="1913255" cy="411480"/>
+          </a:xfrm>
+          <a:prstGeom prst="rect">
+            <a:avLst/>
+          </a:prstGeom>
+          <a:noFill/>
+        </p:spPr>
+        <p:txBody>
+          <a:bodyPr wrap="square" lIns="0" tIns="0" rIns="0" bIns="0" rtlCol="0" anchor="ctr"/>
+          <a:lstStyle/>
+          <a:p>
+            <a:pPr marL="0" indent="0" algn="ctr">
+              <a:buNone/>
+            </a:pPr>
+            <a:r>
+              <a:rPr lang="zh-CN" altLang="en-US" sz="1400" b="1" dirty="0">
+                <a:solidFill>
+                  <a:srgbClr val="FFFFFF"/>
+                </a:solidFill>
+                <a:latin typeface="Calibri" panose="020F0502020204030204" pitchFamily="34" charset="0"/>
+                <a:ea typeface="Calibri" panose="020F0502020204030204" pitchFamily="34" charset="-122"/>
+                <a:cs typeface="Calibri" panose="020F0502020204030204" pitchFamily="34" charset="-120"/>
+              </a:rPr>
+              <a:t>始终平衡</a:t>
+            </a:r>
+            <a:r>
+              <a:rPr lang="zh-CN" altLang="en-US" sz="1400" b="1" dirty="0">
+                <a:solidFill>
+                  <a:srgbClr val="FFFFFF"/>
+                </a:solidFill>
+                <a:latin typeface="Calibri" panose="020F0502020204030204" pitchFamily="34" charset="0"/>
+                <a:ea typeface="Calibri" panose="020F0502020204030204" pitchFamily="34" charset="-122"/>
+                <a:cs typeface="Calibri" panose="020F0502020204030204" pitchFamily="34" charset="-120"/>
+              </a:rPr>
+              <a:t>调度</a:t>
+            </a:r>
+            <a:endParaRPr lang="zh-CN" altLang="en-US" sz="1400" b="1" dirty="0">
+              <a:solidFill>
+                <a:srgbClr val="FFFFFF"/>
+              </a:solidFill>
+              <a:latin typeface="Calibri" panose="020F0502020204030204" pitchFamily="34" charset="0"/>
+              <a:ea typeface="Calibri" panose="020F0502020204030204" pitchFamily="34" charset="-122"/>
+              <a:cs typeface="Calibri" panose="020F0502020204030204" pitchFamily="34" charset="-120"/>
+            </a:endParaRPr>
+          </a:p>
+        </p:txBody>
+      </p:sp>
+      <p:sp>
+        <p:nvSpPr>
+          <p:cNvPr id="49" name="Text 35"/>
+          <p:cNvSpPr/>
+          <p:nvPr/>
+        </p:nvSpPr>
+        <p:spPr>
+          <a:xfrm>
+            <a:off x="7047865" y="3429000"/>
+            <a:ext cx="1719580" cy="228600"/>
+          </a:xfrm>
+          <a:prstGeom prst="rect">
+            <a:avLst/>
+          </a:prstGeom>
+          <a:noFill/>
+        </p:spPr>
+        <p:txBody>
+          <a:bodyPr wrap="square" lIns="0" tIns="0" rIns="0" bIns="0" rtlCol="0" anchor="ctr"/>
+          <a:lstStyle/>
+          <a:p>
+            <a:pPr marL="0" indent="0">
+              <a:buNone/>
+            </a:pPr>
+            <a:r>
+              <a:rPr lang="en-US" sz="900" dirty="0">
+                <a:solidFill>
+                  <a:srgbClr val="64748B"/>
+                </a:solidFill>
+                <a:latin typeface="Calibri" panose="020F0502020204030204" pitchFamily="34" charset="0"/>
+                <a:ea typeface="Calibri" panose="020F0502020204030204" pitchFamily="34" charset="-122"/>
+                <a:cs typeface="Calibri" panose="020F0502020204030204" pitchFamily="34" charset="-120"/>
+              </a:rPr>
+              <a:t>基线 · 固定策略</a:t>
+            </a:r>
+            <a:endParaRPr lang="en-US" sz="900" dirty="0"/>
+          </a:p>
+        </p:txBody>
+      </p:sp>
+      <p:sp>
+        <p:nvSpPr>
+          <p:cNvPr id="50" name="Text 36"/>
+          <p:cNvSpPr/>
+          <p:nvPr/>
+        </p:nvSpPr>
+        <p:spPr>
+          <a:xfrm>
+            <a:off x="7047865" y="3703320"/>
+            <a:ext cx="1719580" cy="777240"/>
+          </a:xfrm>
+          <a:prstGeom prst="rect">
+            <a:avLst/>
+          </a:prstGeom>
+          <a:noFill/>
+        </p:spPr>
+        <p:txBody>
+          <a:bodyPr wrap="square" lIns="0" tIns="0" rIns="0" bIns="0" rtlCol="0" anchor="ctr"/>
+          <a:lstStyle/>
+          <a:p>
+            <a:pPr algn="l">
+              <a:buClrTx/>
+              <a:buSzTx/>
+              <a:buNone/>
+            </a:pPr>
+            <a:r>
+              <a:rPr lang="en-US" sz="1100" dirty="0">
+                <a:solidFill>
+                  <a:srgbClr val="1E293B"/>
+                </a:solidFill>
+                <a:latin typeface="Calibri" panose="020F0502020204030204" pitchFamily="34" charset="0"/>
+                <a:ea typeface="Calibri" panose="020F0502020204030204" pitchFamily="34" charset="-122"/>
+                <a:cs typeface="Calibri" panose="020F0502020204030204" pitchFamily="34" charset="-120"/>
+                <a:sym typeface="+mn-ea"/>
+              </a:rPr>
+              <a:t>始终×0.96 平衡调度</a:t>
+            </a:r>
+            <a:endParaRPr lang="en-US" sz="1100" dirty="0">
+              <a:solidFill>
+                <a:srgbClr val="1E293B"/>
+              </a:solidFill>
+              <a:latin typeface="Calibri" panose="020F0502020204030204" pitchFamily="34" charset="0"/>
+              <a:ea typeface="Calibri" panose="020F0502020204030204" pitchFamily="34" charset="-122"/>
+              <a:cs typeface="Calibri" panose="020F0502020204030204" pitchFamily="34" charset="-120"/>
+            </a:endParaRPr>
+          </a:p>
+          <a:p>
+            <a:pPr algn="l">
+              <a:buClrTx/>
+              <a:buSzTx/>
+              <a:buNone/>
+            </a:pPr>
+            <a:r>
+              <a:rPr lang="en-US" sz="1100" dirty="0">
+                <a:solidFill>
+                  <a:srgbClr val="1E293B"/>
+                </a:solidFill>
+                <a:latin typeface="Calibri" panose="020F0502020204030204" pitchFamily="34" charset="0"/>
+                <a:ea typeface="Calibri" panose="020F0502020204030204" pitchFamily="34" charset="-122"/>
+                <a:cs typeface="Calibri" panose="020F0502020204030204" pitchFamily="34" charset="-120"/>
+                <a:sym typeface="+mn-ea"/>
+              </a:rPr>
+              <a:t>收益与安全的均衡点</a:t>
+            </a:r>
+            <a:endParaRPr lang="en-US" sz="1100" dirty="0">
+              <a:solidFill>
+                <a:srgbClr val="1E293B"/>
+              </a:solidFill>
+              <a:latin typeface="Calibri" panose="020F0502020204030204" pitchFamily="34" charset="0"/>
+              <a:ea typeface="Calibri" panose="020F0502020204030204" pitchFamily="34" charset="-122"/>
+              <a:cs typeface="Calibri" panose="020F0502020204030204" pitchFamily="34" charset="-120"/>
+            </a:endParaRPr>
+          </a:p>
+          <a:p>
+            <a:r>
+              <a:rPr sz="900" b="1">
+                <a:solidFill>
+                  <a:srgbClr val="FF9664"/>
+                </a:solidFill>
+              </a:rPr>
+              <a:t>avg_reward: --</a:t>
+            </a:r>
+            <a:endParaRPr sz="900" b="1">
+              <a:solidFill>
+                <a:srgbClr val="FF9664"/>
+              </a:solidFill>
+            </a:endParaRPr>
           </a:p>
         </p:txBody>
       </p:sp>
@@ -5556,47 +5883,9 @@
           <a:chExt cx="0" cy="0"/>
         </a:xfrm>
       </p:grpSpPr>
-      <p:sp>
-        <p:nvSpPr>
-          <p:cNvPr id="2" name="Text 0"/>
-          <p:cNvSpPr/>
-          <p:nvPr/>
-        </p:nvSpPr>
-        <p:spPr>
-          <a:xfrm>
-            <a:off x="548640" y="274320"/>
-            <a:ext cx="7772400" cy="594360"/>
-          </a:xfrm>
-          <a:prstGeom prst="rect">
-            <a:avLst/>
-          </a:prstGeom>
-          <a:noFill/>
-        </p:spPr>
-        <p:txBody>
-          <a:bodyPr wrap="square" lIns="0" tIns="0" rIns="0" bIns="0" rtlCol="0" anchor="ctr"/>
-          <a:lstStyle/>
-          <a:p>
-            <a:pPr marL="0" indent="0">
-              <a:buNone/>
-            </a:pPr>
-            <a:r>
-              <a:rPr lang="en-US" sz="2800" b="1" dirty="0">
-                <a:solidFill>
-                  <a:srgbClr val="1E293B"/>
-                </a:solidFill>
-                <a:latin typeface="Calibri" panose="020F0502020204030204" pitchFamily="34" charset="0"/>
-                <a:ea typeface="Calibri" panose="020F0502020204030204" pitchFamily="34" charset="-122"/>
-                <a:cs typeface="Calibri" panose="020F0502020204030204" pitchFamily="34" charset="-120"/>
-              </a:rPr>
-              <a:t>系统演示 — 总览大屏</a:t>
-            </a:r>
-            <a:endParaRPr lang="en-US" sz="2800" dirty="0"/>
-          </a:p>
-        </p:txBody>
-      </p:sp>
       <p:pic>
         <p:nvPicPr>
-          <p:cNvPr id="5" name="Image 0" descr="preencoded.png"/>
+          <p:cNvPr id="43" name="图片 42"/>
           <p:cNvPicPr>
             <a:picLocks noChangeAspect="1"/>
           </p:cNvPicPr>
@@ -5610,232 +5899,8 @@
         </p:blipFill>
         <p:spPr>
           <a:xfrm>
-            <a:off x="4297680" y="2148840"/>
-            <a:ext cx="548640" cy="548640"/>
-          </a:xfrm>
-          <a:prstGeom prst="rect">
-            <a:avLst/>
-          </a:prstGeom>
-        </p:spPr>
-      </p:pic>
-      <p:sp>
-        <p:nvSpPr>
-          <p:cNvPr id="6" name="Text 3"/>
-          <p:cNvSpPr/>
-          <p:nvPr/>
-        </p:nvSpPr>
-        <p:spPr>
-          <a:xfrm>
-            <a:off x="457200" y="2743200"/>
-            <a:ext cx="8229600" cy="274320"/>
-          </a:xfrm>
-          <a:prstGeom prst="rect">
-            <a:avLst/>
-          </a:prstGeom>
-          <a:noFill/>
-        </p:spPr>
-        <p:txBody>
-          <a:bodyPr wrap="square" lIns="0" tIns="0" rIns="0" bIns="0" rtlCol="0" anchor="ctr"/>
-          <a:lstStyle/>
-          <a:p>
-            <a:pPr marL="0" indent="0" algn="ctr">
-              <a:buNone/>
-            </a:pPr>
-            <a:r>
-              <a:rPr lang="en-US" sz="1200" b="1" dirty="0">
-                <a:solidFill>
-                  <a:srgbClr val="1C7293"/>
-                </a:solidFill>
-                <a:latin typeface="Calibri" panose="020F0502020204030204" pitchFamily="34" charset="0"/>
-                <a:ea typeface="Calibri" panose="020F0502020204030204" pitchFamily="34" charset="-122"/>
-                <a:cs typeface="Calibri" panose="020F0502020204030204" pitchFamily="34" charset="-120"/>
-              </a:rPr>
-              <a:t>【截图占位】</a:t>
-            </a:r>
-            <a:endParaRPr lang="en-US" sz="1200" dirty="0"/>
-          </a:p>
-        </p:txBody>
-      </p:sp>
-      <p:sp>
-        <p:nvSpPr>
-          <p:cNvPr id="7" name="Text 4"/>
-          <p:cNvSpPr/>
-          <p:nvPr/>
-        </p:nvSpPr>
-        <p:spPr>
-          <a:xfrm>
-            <a:off x="457200" y="3017520"/>
-            <a:ext cx="8229600" cy="228600"/>
-          </a:xfrm>
-          <a:prstGeom prst="rect">
-            <a:avLst/>
-          </a:prstGeom>
-          <a:noFill/>
-        </p:spPr>
-        <p:txBody>
-          <a:bodyPr wrap="square" lIns="0" tIns="0" rIns="0" bIns="0" rtlCol="0" anchor="ctr"/>
-          <a:lstStyle/>
-          <a:p>
-            <a:pPr marL="0" indent="0" algn="ctr">
-              <a:buNone/>
-            </a:pPr>
-            <a:r>
-              <a:rPr lang="en-US" sz="900" dirty="0">
-                <a:solidFill>
-                  <a:srgbClr val="64748B"/>
-                </a:solidFill>
-                <a:latin typeface="Calibri" panose="020F0502020204030204" pitchFamily="34" charset="0"/>
-                <a:ea typeface="Calibri" panose="020F0502020204030204" pitchFamily="34" charset="-122"/>
-                <a:cs typeface="Calibri" panose="020F0502020204030204" pitchFamily="34" charset="-120"/>
-              </a:rPr>
-              <a:t>请截取 Overview 总览大屏全页</a:t>
-            </a:r>
-            <a:endParaRPr lang="en-US" sz="900" dirty="0"/>
-          </a:p>
-          <a:p>
-            <a:pPr marL="0" indent="0" algn="ctr">
-              <a:buNone/>
-            </a:pPr>
-            <a:r>
-              <a:rPr lang="en-US" sz="900" dirty="0">
-                <a:solidFill>
-                  <a:srgbClr val="64748B"/>
-                </a:solidFill>
-                <a:latin typeface="Calibri" panose="020F0502020204030204" pitchFamily="34" charset="0"/>
-                <a:ea typeface="Calibri" panose="020F0502020204030204" pitchFamily="34" charset="-122"/>
-                <a:cs typeface="Calibri" panose="020F0502020204030204" pitchFamily="34" charset="-120"/>
-              </a:rPr>
-              <a:t>包含：汇总卡片 · 验证集精度 · 策略对比矩阵 · 风险热区 · 算法仿真对比 · 数据时间线</a:t>
-            </a:r>
-            <a:endParaRPr lang="en-US" sz="900" dirty="0"/>
-          </a:p>
-        </p:txBody>
-      </p:sp>
-      <p:sp>
-        <p:nvSpPr>
-          <p:cNvPr id="8" name="Shape 5"/>
-          <p:cNvSpPr/>
-          <p:nvPr/>
-        </p:nvSpPr>
-        <p:spPr>
-          <a:xfrm>
-            <a:off x="457200" y="4160520"/>
-            <a:ext cx="8229600" cy="822960"/>
-          </a:xfrm>
-          <a:prstGeom prst="rect">
-            <a:avLst/>
-          </a:prstGeom>
-          <a:solidFill>
-            <a:srgbClr val="FFFFFF"/>
-          </a:solidFill>
-          <a:effectLst>
-            <a:outerShdw blurRad="50800" dist="25400" dir="8100000" algn="bl" rotWithShape="0">
-              <a:srgbClr val="000000">
-                <a:alpha val="8000"/>
-              </a:srgbClr>
-            </a:outerShdw>
-          </a:effectLst>
-        </p:spPr>
-      </p:sp>
-      <p:sp>
-        <p:nvSpPr>
-          <p:cNvPr id="9" name="Shape 6"/>
-          <p:cNvSpPr/>
-          <p:nvPr/>
-        </p:nvSpPr>
-        <p:spPr>
-          <a:xfrm>
-            <a:off x="457200" y="4160520"/>
-            <a:ext cx="54864" cy="822960"/>
-          </a:xfrm>
-          <a:prstGeom prst="rect">
-            <a:avLst/>
-          </a:prstGeom>
-          <a:solidFill>
-            <a:srgbClr val="1C7293"/>
-          </a:solidFill>
-        </p:spPr>
-      </p:sp>
-      <p:pic>
-        <p:nvPicPr>
-          <p:cNvPr id="10" name="Image 1" descr="preencoded.png"/>
-          <p:cNvPicPr>
-            <a:picLocks noChangeAspect="1"/>
-          </p:cNvPicPr>
-          <p:nvPr/>
-        </p:nvPicPr>
-        <p:blipFill>
-          <a:blip r:embed="rId1"/>
-          <a:stretch>
-            <a:fillRect/>
-          </a:stretch>
-        </p:blipFill>
-        <p:spPr>
-          <a:xfrm>
-            <a:off x="640080" y="4297680"/>
-            <a:ext cx="274320" cy="274320"/>
-          </a:xfrm>
-          <a:prstGeom prst="rect">
-            <a:avLst/>
-          </a:prstGeom>
-        </p:spPr>
-      </p:pic>
-      <p:sp>
-        <p:nvSpPr>
-          <p:cNvPr id="11" name="Text 7"/>
-          <p:cNvSpPr/>
-          <p:nvPr/>
-        </p:nvSpPr>
-        <p:spPr>
-          <a:xfrm>
-            <a:off x="1051560" y="4297680"/>
-            <a:ext cx="7406640" cy="502920"/>
-          </a:xfrm>
-          <a:prstGeom prst="rect">
-            <a:avLst/>
-          </a:prstGeom>
-          <a:noFill/>
-        </p:spPr>
-        <p:txBody>
-          <a:bodyPr wrap="square" lIns="0" tIns="0" rIns="0" bIns="0" rtlCol="0" anchor="ctr"/>
-          <a:lstStyle/>
-          <a:p>
-            <a:pPr marL="0" indent="0">
-              <a:buNone/>
-            </a:pPr>
-            <a:r>
-              <a:rPr lang="en-US" sz="1100" dirty="0">
-                <a:solidFill>
-                  <a:srgbClr val="64748B"/>
-                </a:solidFill>
-                <a:latin typeface="Calibri" panose="020F0502020204030204" pitchFamily="34" charset="0"/>
-                <a:ea typeface="Calibri" panose="020F0502020204030204" pitchFamily="34" charset="-122"/>
-                <a:cs typeface="Calibri" panose="020F0502020204030204" pitchFamily="34" charset="-120"/>
-              </a:rPr>
-              <a:t>总览大屏是系统的核心仪表盘，集中展示验证集精度分析、数据时间线说明、风险热区分布、多策略横向对比矩阵和算法仿真对比结果</a:t>
-            </a:r>
-            <a:endParaRPr lang="en-US" sz="1100" dirty="0"/>
-          </a:p>
-        </p:txBody>
-      </p:sp>
-      <p:pic>
-        <p:nvPicPr>
-          <p:cNvPr id="13" name="图片 12"/>
-          <p:cNvPicPr>
-            <a:picLocks noChangeAspect="1"/>
-          </p:cNvPicPr>
-          <p:nvPr/>
-        </p:nvPicPr>
-        <p:blipFill>
-          <a:blip r:embed="rId2"/>
-          <a:stretch>
-            <a:fillRect/>
-          </a:stretch>
-        </p:blipFill>
-        <p:spPr>
-          <a:xfrm>
-            <a:off x="1558925" y="804545"/>
-            <a:ext cx="5751830" cy="3398520"/>
+            <a:off x="1303020" y="30480"/>
+            <a:ext cx="6537960" cy="5113020"/>
           </a:xfrm>
           <a:prstGeom prst="rect">
             <a:avLst/>
@@ -5899,7 +5964,7 @@
               <a:buNone/>
             </a:pPr>
             <a:r>
-              <a:rPr lang="en-US" sz="2600" b="1" dirty="0">
+              <a:rPr lang="en-US" sz="2800" b="1" dirty="0">
                 <a:solidFill>
                   <a:srgbClr val="1E293B"/>
                 </a:solidFill>
@@ -5907,47 +5972,9 @@
                 <a:ea typeface="Calibri" panose="020F0502020204030204" pitchFamily="34" charset="-122"/>
                 <a:cs typeface="Calibri" panose="020F0502020204030204" pitchFamily="34" charset="-120"/>
               </a:rPr>
-              <a:t>系统演示 — 站点驾驶舱 &amp; 算法实验</a:t>
-            </a:r>
-            <a:endParaRPr lang="en-US" sz="2600" dirty="0"/>
-          </a:p>
-        </p:txBody>
-      </p:sp>
-      <p:sp>
-        <p:nvSpPr>
-          <p:cNvPr id="3" name="Text 1"/>
-          <p:cNvSpPr/>
-          <p:nvPr/>
-        </p:nvSpPr>
-        <p:spPr>
-          <a:xfrm>
-            <a:off x="548640" y="777240"/>
-            <a:ext cx="1828800" cy="228600"/>
-          </a:xfrm>
-          <a:prstGeom prst="rect">
-            <a:avLst/>
-          </a:prstGeom>
-          <a:noFill/>
-        </p:spPr>
-        <p:txBody>
-          <a:bodyPr wrap="square" lIns="0" tIns="0" rIns="0" bIns="0" rtlCol="0" anchor="ctr"/>
-          <a:lstStyle/>
-          <a:p>
-            <a:pPr marL="0" indent="0">
-              <a:buNone/>
-            </a:pPr>
-            <a:r>
-              <a:rPr lang="en-US" sz="1000" dirty="0">
-                <a:solidFill>
-                  <a:srgbClr val="64748B"/>
-                </a:solidFill>
-                <a:latin typeface="Consolas" panose="020B0609020204030204" pitchFamily="34" charset="0"/>
-                <a:ea typeface="Consolas" panose="020B0609020204030204" pitchFamily="34" charset="-122"/>
-                <a:cs typeface="Consolas" panose="020B0609020204030204" pitchFamily="34" charset="-120"/>
-              </a:rPr>
-              <a:t>/sites</a:t>
-            </a:r>
-            <a:endParaRPr lang="en-US" sz="1000" dirty="0"/>
+              <a:t>系统演示 — 总览大屏</a:t>
+            </a:r>
+            <a:endParaRPr lang="en-US" sz="2800" dirty="0"/>
           </a:p>
         </p:txBody>
       </p:sp>
@@ -5957,21 +5984,17 @@
           <p:cNvPicPr>
             <a:picLocks noChangeAspect="1"/>
           </p:cNvPicPr>
-          <p:nvPr>
-            <p:custDataLst>
-              <p:tags r:id="rId1"/>
-            </p:custDataLst>
-          </p:nvPr>
+          <p:nvPr/>
         </p:nvPicPr>
         <p:blipFill>
-          <a:blip r:embed="rId2"/>
+          <a:blip r:embed="rId1"/>
           <a:stretch>
             <a:fillRect/>
           </a:stretch>
         </p:blipFill>
         <p:spPr>
           <a:xfrm>
-            <a:off x="2148840" y="1851660"/>
+            <a:off x="4297680" y="2148840"/>
             <a:ext cx="548640" cy="548640"/>
           </a:xfrm>
           <a:prstGeom prst="rect">
@@ -5983,16 +6006,12 @@
         <p:nvSpPr>
           <p:cNvPr id="6" name="Text 3"/>
           <p:cNvSpPr/>
-          <p:nvPr>
-            <p:custDataLst>
-              <p:tags r:id="rId3"/>
-            </p:custDataLst>
-          </p:nvPr>
-        </p:nvSpPr>
-        <p:spPr>
-          <a:xfrm>
-            <a:off x="457200" y="2446020"/>
-            <a:ext cx="3931920" cy="274320"/>
+          <p:nvPr/>
+        </p:nvSpPr>
+        <p:spPr>
+          <a:xfrm>
+            <a:off x="457200" y="2743200"/>
+            <a:ext cx="8229600" cy="274320"/>
           </a:xfrm>
           <a:prstGeom prst="rect">
             <a:avLst/>
@@ -6025,16 +6044,12 @@
         <p:nvSpPr>
           <p:cNvPr id="7" name="Text 4"/>
           <p:cNvSpPr/>
-          <p:nvPr>
-            <p:custDataLst>
-              <p:tags r:id="rId4"/>
-            </p:custDataLst>
-          </p:nvPr>
-        </p:nvSpPr>
-        <p:spPr>
-          <a:xfrm>
-            <a:off x="457200" y="2720340"/>
-            <a:ext cx="3931920" cy="228600"/>
+          <p:nvPr/>
+        </p:nvSpPr>
+        <p:spPr>
+          <a:xfrm>
+            <a:off x="457200" y="3017520"/>
+            <a:ext cx="8229600" cy="228600"/>
           </a:xfrm>
           <a:prstGeom prst="rect">
             <a:avLst/>
@@ -6057,7 +6072,7 @@
                 <a:ea typeface="Calibri" panose="020F0502020204030204" pitchFamily="34" charset="-122"/>
                 <a:cs typeface="Calibri" panose="020F0502020204030204" pitchFamily="34" charset="-120"/>
               </a:rPr>
-              <a:t>站点驾驶舱截图</a:t>
+              <a:t>请截取 Overview 总览大屏全页</a:t>
             </a:r>
             <a:endParaRPr lang="en-US" sz="900" dirty="0"/>
           </a:p>
@@ -6074,7 +6089,7 @@
                 <a:ea typeface="Calibri" panose="020F0502020204030204" pitchFamily="34" charset="-122"/>
                 <a:cs typeface="Calibri" panose="020F0502020204030204" pitchFamily="34" charset="-120"/>
               </a:rPr>
-              <a:t>预测vs实际功率曲线 + 风险带 + 日汇总</a:t>
+              <a:t>包含：汇总卡片 · 验证集精度 · 策略对比矩阵 · 风险热区 · 算法仿真对比 · 数据时间线</a:t>
             </a:r>
             <a:endParaRPr lang="en-US" sz="900" dirty="0"/>
           </a:p>
@@ -6084,16 +6099,12 @@
         <p:nvSpPr>
           <p:cNvPr id="8" name="Shape 5"/>
           <p:cNvSpPr/>
-          <p:nvPr>
-            <p:custDataLst>
-              <p:tags r:id="rId5"/>
-            </p:custDataLst>
-          </p:nvPr>
-        </p:nvSpPr>
-        <p:spPr>
-          <a:xfrm>
-            <a:off x="457200" y="3657600"/>
-            <a:ext cx="3931920" cy="1325880"/>
+          <p:nvPr/>
+        </p:nvSpPr>
+        <p:spPr>
+          <a:xfrm>
+            <a:off x="457200" y="4160520"/>
+            <a:ext cx="8229600" cy="822960"/>
           </a:xfrm>
           <a:prstGeom prst="rect">
             <a:avLst/>
@@ -6114,22 +6125,18 @@
         <p:nvSpPr>
           <p:cNvPr id="9" name="Shape 6"/>
           <p:cNvSpPr/>
-          <p:nvPr>
-            <p:custDataLst>
-              <p:tags r:id="rId6"/>
-            </p:custDataLst>
-          </p:nvPr>
-        </p:nvSpPr>
-        <p:spPr>
-          <a:xfrm>
-            <a:off x="457200" y="3657600"/>
-            <a:ext cx="54864" cy="1325880"/>
+          <p:nvPr/>
+        </p:nvSpPr>
+        <p:spPr>
+          <a:xfrm>
+            <a:off x="457200" y="4160520"/>
+            <a:ext cx="54864" cy="822960"/>
           </a:xfrm>
           <a:prstGeom prst="rect">
             <a:avLst/>
           </a:prstGeom>
           <a:solidFill>
-            <a:srgbClr val="2563EB"/>
+            <a:srgbClr val="1C7293"/>
           </a:solidFill>
         </p:spPr>
       </p:sp>
@@ -6139,21 +6146,17 @@
           <p:cNvPicPr>
             <a:picLocks noChangeAspect="1"/>
           </p:cNvPicPr>
-          <p:nvPr>
-            <p:custDataLst>
-              <p:tags r:id="rId7"/>
-            </p:custDataLst>
-          </p:nvPr>
+          <p:nvPr/>
         </p:nvPicPr>
         <p:blipFill>
-          <a:blip r:embed="rId8"/>
+          <a:blip r:embed="rId1"/>
           <a:stretch>
             <a:fillRect/>
           </a:stretch>
         </p:blipFill>
         <p:spPr>
           <a:xfrm>
-            <a:off x="640080" y="3794760"/>
+            <a:off x="640080" y="4297680"/>
             <a:ext cx="274320" cy="274320"/>
           </a:xfrm>
           <a:prstGeom prst="rect">
@@ -6165,16 +6168,12 @@
         <p:nvSpPr>
           <p:cNvPr id="11" name="Text 7"/>
           <p:cNvSpPr/>
-          <p:nvPr>
-            <p:custDataLst>
-              <p:tags r:id="rId9"/>
-            </p:custDataLst>
-          </p:nvPr>
-        </p:nvSpPr>
-        <p:spPr>
-          <a:xfrm>
-            <a:off x="1051560" y="3794760"/>
-            <a:ext cx="3017520" cy="274320"/>
+          <p:nvPr/>
+        </p:nvSpPr>
+        <p:spPr>
+          <a:xfrm>
+            <a:off x="1051560" y="4297680"/>
+            <a:ext cx="7406640" cy="502920"/>
           </a:xfrm>
           <a:prstGeom prst="rect">
             <a:avLst/>
@@ -6189,162 +6188,27 @@
               <a:buNone/>
             </a:pPr>
             <a:r>
-              <a:rPr lang="en-US" sz="1400" b="1" dirty="0">
-                <a:solidFill>
-                  <a:srgbClr val="1E293B"/>
-                </a:solidFill>
-                <a:latin typeface="Calibri" panose="020F0502020204030204" pitchFamily="34" charset="0"/>
-                <a:ea typeface="Calibri" panose="020F0502020204030204" pitchFamily="34" charset="-122"/>
-                <a:cs typeface="Calibri" panose="020F0502020204030204" pitchFamily="34" charset="-120"/>
-              </a:rPr>
-              <a:t>站点驾驶舱</a:t>
-            </a:r>
-            <a:endParaRPr lang="en-US" sz="1400" dirty="0"/>
-          </a:p>
-        </p:txBody>
-      </p:sp>
-      <p:sp>
-        <p:nvSpPr>
-          <p:cNvPr id="12" name="Text 8"/>
-          <p:cNvSpPr/>
-          <p:nvPr>
-            <p:custDataLst>
-              <p:tags r:id="rId10"/>
-            </p:custDataLst>
-          </p:nvPr>
-        </p:nvSpPr>
-        <p:spPr>
-          <a:xfrm>
-            <a:off x="640080" y="4160520"/>
-            <a:ext cx="3566160" cy="731520"/>
-          </a:xfrm>
-          <a:prstGeom prst="rect">
-            <a:avLst/>
-          </a:prstGeom>
-          <a:noFill/>
-        </p:spPr>
-        <p:txBody>
-          <a:bodyPr wrap="square" rtlCol="0" anchor="t"/>
-          <a:lstStyle/>
-          <a:p>
-            <a:pPr marL="0" indent="0">
-              <a:buNone/>
-            </a:pPr>
-            <a:r>
-              <a:rPr lang="en-US" sz="1000" dirty="0">
-                <a:solidFill>
-                  <a:srgbClr val="1E293B"/>
-                </a:solidFill>
-                <a:latin typeface="Calibri" panose="020F0502020204030204" pitchFamily="34" charset="0"/>
-                <a:ea typeface="Calibri" panose="020F0502020204030204" pitchFamily="34" charset="-122"/>
-                <a:cs typeface="Calibri" panose="020F0502020204030204" pitchFamily="34" charset="-120"/>
-              </a:rPr>
-              <a:t>· 风场地图 + 站点切换</a:t>
-            </a:r>
-            <a:endParaRPr lang="en-US" sz="1000" dirty="0"/>
-          </a:p>
-          <a:p>
-            <a:pPr marL="0" indent="0">
-              <a:buNone/>
-            </a:pPr>
-            <a:r>
-              <a:rPr lang="en-US" sz="1000" dirty="0">
-                <a:solidFill>
-                  <a:srgbClr val="1E293B"/>
-                </a:solidFill>
-                <a:latin typeface="Calibri" panose="020F0502020204030204" pitchFamily="34" charset="0"/>
-                <a:ea typeface="Calibri" panose="020F0502020204030204" pitchFamily="34" charset="-122"/>
-                <a:cs typeface="Calibri" panose="020F0502020204030204" pitchFamily="34" charset="-120"/>
-              </a:rPr>
-              <a:t>· 预测 vs 真实功率时序对比曲线</a:t>
-            </a:r>
-            <a:endParaRPr lang="en-US" sz="1000" dirty="0"/>
-          </a:p>
-          <a:p>
-            <a:pPr marL="0" indent="0">
-              <a:buNone/>
-            </a:pPr>
-            <a:r>
-              <a:rPr lang="en-US" sz="1000" dirty="0">
-                <a:solidFill>
-                  <a:srgbClr val="1E293B"/>
-                </a:solidFill>
-                <a:latin typeface="Calibri" panose="020F0502020204030204" pitchFamily="34" charset="0"/>
-                <a:ea typeface="Calibri" panose="020F0502020204030204" pitchFamily="34" charset="-122"/>
-                <a:cs typeface="Calibri" panose="020F0502020204030204" pitchFamily="34" charset="-120"/>
-              </a:rPr>
-              <a:t>· 风险带 + 日汇总统计表格</a:t>
-            </a:r>
-            <a:endParaRPr lang="en-US" sz="1000" dirty="0"/>
-          </a:p>
-          <a:p>
-            <a:pPr marL="0" indent="0">
-              <a:buNone/>
-            </a:pPr>
-            <a:r>
-              <a:rPr lang="en-US" sz="1000" dirty="0">
-                <a:solidFill>
-                  <a:srgbClr val="1E293B"/>
-                </a:solidFill>
-                <a:latin typeface="Calibri" panose="020F0502020204030204" pitchFamily="34" charset="0"/>
-                <a:ea typeface="Calibri" panose="020F0502020204030204" pitchFamily="34" charset="-122"/>
-                <a:cs typeface="Calibri" panose="020F0502020204030204" pitchFamily="34" charset="-120"/>
-              </a:rPr>
-              <a:t>· 高风险窗口 Top 10 标注</a:t>
-            </a:r>
-            <a:endParaRPr lang="en-US" sz="1000" dirty="0"/>
-          </a:p>
-        </p:txBody>
-      </p:sp>
-      <p:sp>
-        <p:nvSpPr>
-          <p:cNvPr id="13" name="Text 9"/>
-          <p:cNvSpPr/>
-          <p:nvPr/>
-        </p:nvSpPr>
-        <p:spPr>
-          <a:xfrm>
-            <a:off x="5029200" y="777240"/>
-            <a:ext cx="2743200" cy="228600"/>
-          </a:xfrm>
-          <a:prstGeom prst="rect">
-            <a:avLst/>
-          </a:prstGeom>
-          <a:noFill/>
-        </p:spPr>
-        <p:txBody>
-          <a:bodyPr wrap="square" lIns="0" tIns="0" rIns="0" bIns="0" rtlCol="0" anchor="ctr"/>
-          <a:lstStyle/>
-          <a:p>
-            <a:pPr marL="0" indent="0">
-              <a:buNone/>
-            </a:pPr>
-            <a:r>
-              <a:rPr lang="en-US" sz="1000" dirty="0">
+              <a:rPr lang="en-US" sz="1100" dirty="0">
                 <a:solidFill>
                   <a:srgbClr val="64748B"/>
                 </a:solidFill>
-                <a:latin typeface="Consolas" panose="020B0609020204030204" pitchFamily="34" charset="0"/>
-                <a:ea typeface="Consolas" panose="020B0609020204030204" pitchFamily="34" charset="-122"/>
-                <a:cs typeface="Consolas" panose="020B0609020204030204" pitchFamily="34" charset="-120"/>
-              </a:rPr>
-              <a:t>/experiments</a:t>
-            </a:r>
-            <a:endParaRPr lang="en-US" sz="1000" dirty="0"/>
+                <a:latin typeface="Calibri" panose="020F0502020204030204" pitchFamily="34" charset="0"/>
+                <a:ea typeface="Calibri" panose="020F0502020204030204" pitchFamily="34" charset="-122"/>
+                <a:cs typeface="Calibri" panose="020F0502020204030204" pitchFamily="34" charset="-120"/>
+              </a:rPr>
+              <a:t>总览大屏是系统的核心仪表盘，集中展示验证集精度分析、数据时间线说明、风险热区分布、多策略横向对比矩阵和算法仿真对比结果</a:t>
+            </a:r>
+            <a:endParaRPr lang="en-US" sz="1100" dirty="0"/>
           </a:p>
         </p:txBody>
       </p:sp>
       <p:pic>
         <p:nvPicPr>
-          <p:cNvPr id="15" name="Image 2" descr="preencoded.png"/>
+          <p:cNvPr id="13" name="图片 12"/>
           <p:cNvPicPr>
             <a:picLocks noChangeAspect="1"/>
           </p:cNvPicPr>
-          <p:nvPr>
-            <p:custDataLst>
-              <p:tags r:id="rId11"/>
-            </p:custDataLst>
-          </p:nvPr>
+          <p:nvPr/>
         </p:nvPicPr>
         <p:blipFill>
           <a:blip r:embed="rId2"/>
@@ -6354,377 +6218,8 @@
         </p:blipFill>
         <p:spPr>
           <a:xfrm>
-            <a:off x="6446520" y="1851660"/>
-            <a:ext cx="548640" cy="548640"/>
-          </a:xfrm>
-          <a:prstGeom prst="rect">
-            <a:avLst/>
-          </a:prstGeom>
-        </p:spPr>
-      </p:pic>
-      <p:sp>
-        <p:nvSpPr>
-          <p:cNvPr id="16" name="Text 11"/>
-          <p:cNvSpPr/>
-          <p:nvPr>
-            <p:custDataLst>
-              <p:tags r:id="rId12"/>
-            </p:custDataLst>
-          </p:nvPr>
-        </p:nvSpPr>
-        <p:spPr>
-          <a:xfrm>
-            <a:off x="4754880" y="2446020"/>
-            <a:ext cx="3931920" cy="274320"/>
-          </a:xfrm>
-          <a:prstGeom prst="rect">
-            <a:avLst/>
-          </a:prstGeom>
-          <a:noFill/>
-        </p:spPr>
-        <p:txBody>
-          <a:bodyPr wrap="square" lIns="0" tIns="0" rIns="0" bIns="0" rtlCol="0" anchor="ctr"/>
-          <a:lstStyle/>
-          <a:p>
-            <a:pPr marL="0" indent="0" algn="ctr">
-              <a:buNone/>
-            </a:pPr>
-            <a:r>
-              <a:rPr lang="en-US" sz="1200" b="1" dirty="0">
-                <a:solidFill>
-                  <a:srgbClr val="1C7293"/>
-                </a:solidFill>
-                <a:latin typeface="Calibri" panose="020F0502020204030204" pitchFamily="34" charset="0"/>
-                <a:ea typeface="Calibri" panose="020F0502020204030204" pitchFamily="34" charset="-122"/>
-                <a:cs typeface="Calibri" panose="020F0502020204030204" pitchFamily="34" charset="-120"/>
-              </a:rPr>
-              <a:t>【截图占位】</a:t>
-            </a:r>
-            <a:endParaRPr lang="en-US" sz="1200" dirty="0"/>
-          </a:p>
-        </p:txBody>
-      </p:sp>
-      <p:sp>
-        <p:nvSpPr>
-          <p:cNvPr id="17" name="Text 12"/>
-          <p:cNvSpPr/>
-          <p:nvPr>
-            <p:custDataLst>
-              <p:tags r:id="rId13"/>
-            </p:custDataLst>
-          </p:nvPr>
-        </p:nvSpPr>
-        <p:spPr>
-          <a:xfrm>
-            <a:off x="4754880" y="2720340"/>
-            <a:ext cx="3931920" cy="228600"/>
-          </a:xfrm>
-          <a:prstGeom prst="rect">
-            <a:avLst/>
-          </a:prstGeom>
-          <a:noFill/>
-        </p:spPr>
-        <p:txBody>
-          <a:bodyPr wrap="square" lIns="0" tIns="0" rIns="0" bIns="0" rtlCol="0" anchor="ctr"/>
-          <a:lstStyle/>
-          <a:p>
-            <a:pPr marL="0" indent="0" algn="ctr">
-              <a:buNone/>
-            </a:pPr>
-            <a:r>
-              <a:rPr lang="en-US" sz="900" dirty="0">
-                <a:solidFill>
-                  <a:srgbClr val="64748B"/>
-                </a:solidFill>
-                <a:latin typeface="Calibri" panose="020F0502020204030204" pitchFamily="34" charset="0"/>
-                <a:ea typeface="Calibri" panose="020F0502020204030204" pitchFamily="34" charset="-122"/>
-                <a:cs typeface="Calibri" panose="020F0502020204030204" pitchFamily="34" charset="-120"/>
-              </a:rPr>
-              <a:t>算法实验页截图</a:t>
-            </a:r>
-            <a:endParaRPr lang="en-US" sz="900" dirty="0"/>
-          </a:p>
-          <a:p>
-            <a:pPr marL="0" indent="0" algn="ctr">
-              <a:buNone/>
-            </a:pPr>
-            <a:r>
-              <a:rPr lang="en-US" sz="900" dirty="0">
-                <a:solidFill>
-                  <a:srgbClr val="64748B"/>
-                </a:solidFill>
-                <a:latin typeface="Calibri" panose="020F0502020204030204" pitchFamily="34" charset="0"/>
-                <a:ea typeface="Calibri" panose="020F0502020204030204" pitchFamily="34" charset="-122"/>
-                <a:cs typeface="Calibri" panose="020F0502020204030204" pitchFamily="34" charset="-120"/>
-              </a:rPr>
-              <a:t>多策略对比卡片 + 调度功率 vs 实际功率</a:t>
-            </a:r>
-            <a:endParaRPr lang="en-US" sz="900" dirty="0"/>
-          </a:p>
-        </p:txBody>
-      </p:sp>
-      <p:sp>
-        <p:nvSpPr>
-          <p:cNvPr id="18" name="Shape 13"/>
-          <p:cNvSpPr/>
-          <p:nvPr>
-            <p:custDataLst>
-              <p:tags r:id="rId14"/>
-            </p:custDataLst>
-          </p:nvPr>
-        </p:nvSpPr>
-        <p:spPr>
-          <a:xfrm>
-            <a:off x="4754880" y="3657600"/>
-            <a:ext cx="3931920" cy="1325880"/>
-          </a:xfrm>
-          <a:prstGeom prst="rect">
-            <a:avLst/>
-          </a:prstGeom>
-          <a:solidFill>
-            <a:srgbClr val="FFFFFF"/>
-          </a:solidFill>
-          <a:effectLst>
-            <a:outerShdw blurRad="50800" dist="25400" dir="8100000" algn="bl" rotWithShape="0">
-              <a:srgbClr val="000000">
-                <a:alpha val="8000"/>
-              </a:srgbClr>
-            </a:outerShdw>
-          </a:effectLst>
-        </p:spPr>
-      </p:sp>
-      <p:sp>
-        <p:nvSpPr>
-          <p:cNvPr id="19" name="Shape 14"/>
-          <p:cNvSpPr/>
-          <p:nvPr>
-            <p:custDataLst>
-              <p:tags r:id="rId15"/>
-            </p:custDataLst>
-          </p:nvPr>
-        </p:nvSpPr>
-        <p:spPr>
-          <a:xfrm>
-            <a:off x="4754880" y="3657600"/>
-            <a:ext cx="54864" cy="1325880"/>
-          </a:xfrm>
-          <a:prstGeom prst="rect">
-            <a:avLst/>
-          </a:prstGeom>
-          <a:solidFill>
-            <a:srgbClr val="7C3AED"/>
-          </a:solidFill>
-        </p:spPr>
-      </p:sp>
-      <p:pic>
-        <p:nvPicPr>
-          <p:cNvPr id="20" name="Image 3" descr="preencoded.png"/>
-          <p:cNvPicPr>
-            <a:picLocks noChangeAspect="1"/>
-          </p:cNvPicPr>
-          <p:nvPr>
-            <p:custDataLst>
-              <p:tags r:id="rId16"/>
-            </p:custDataLst>
-          </p:nvPr>
-        </p:nvPicPr>
-        <p:blipFill>
-          <a:blip r:embed="rId17"/>
-          <a:stretch>
-            <a:fillRect/>
-          </a:stretch>
-        </p:blipFill>
-        <p:spPr>
-          <a:xfrm>
-            <a:off x="4937760" y="3794760"/>
-            <a:ext cx="274320" cy="274320"/>
-          </a:xfrm>
-          <a:prstGeom prst="rect">
-            <a:avLst/>
-          </a:prstGeom>
-        </p:spPr>
-      </p:pic>
-      <p:sp>
-        <p:nvSpPr>
-          <p:cNvPr id="21" name="Text 15"/>
-          <p:cNvSpPr/>
-          <p:nvPr>
-            <p:custDataLst>
-              <p:tags r:id="rId18"/>
-            </p:custDataLst>
-          </p:nvPr>
-        </p:nvSpPr>
-        <p:spPr>
-          <a:xfrm>
-            <a:off x="5349240" y="3794760"/>
-            <a:ext cx="3017520" cy="274320"/>
-          </a:xfrm>
-          <a:prstGeom prst="rect">
-            <a:avLst/>
-          </a:prstGeom>
-          <a:noFill/>
-        </p:spPr>
-        <p:txBody>
-          <a:bodyPr wrap="square" lIns="0" tIns="0" rIns="0" bIns="0" rtlCol="0" anchor="ctr"/>
-          <a:lstStyle/>
-          <a:p>
-            <a:pPr marL="0" indent="0">
-              <a:buNone/>
-            </a:pPr>
-            <a:r>
-              <a:rPr lang="en-US" sz="1400" b="1" dirty="0">
-                <a:solidFill>
-                  <a:srgbClr val="1E293B"/>
-                </a:solidFill>
-                <a:latin typeface="Calibri" panose="020F0502020204030204" pitchFamily="34" charset="0"/>
-                <a:ea typeface="Calibri" panose="020F0502020204030204" pitchFamily="34" charset="-122"/>
-                <a:cs typeface="Calibri" panose="020F0502020204030204" pitchFamily="34" charset="-120"/>
-              </a:rPr>
-              <a:t>算法实验页</a:t>
-            </a:r>
-            <a:endParaRPr lang="en-US" sz="1400" dirty="0"/>
-          </a:p>
-        </p:txBody>
-      </p:sp>
-      <p:sp>
-        <p:nvSpPr>
-          <p:cNvPr id="22" name="Text 16"/>
-          <p:cNvSpPr/>
-          <p:nvPr>
-            <p:custDataLst>
-              <p:tags r:id="rId19"/>
-            </p:custDataLst>
-          </p:nvPr>
-        </p:nvSpPr>
-        <p:spPr>
-          <a:xfrm>
-            <a:off x="4937760" y="4160520"/>
-            <a:ext cx="3566160" cy="731520"/>
-          </a:xfrm>
-          <a:prstGeom prst="rect">
-            <a:avLst/>
-          </a:prstGeom>
-          <a:noFill/>
-        </p:spPr>
-        <p:txBody>
-          <a:bodyPr wrap="square" rtlCol="0" anchor="t"/>
-          <a:lstStyle/>
-          <a:p>
-            <a:pPr marL="0" indent="0">
-              <a:buNone/>
-            </a:pPr>
-            <a:r>
-              <a:rPr lang="en-US" sz="1000" dirty="0">
-                <a:solidFill>
-                  <a:srgbClr val="1E293B"/>
-                </a:solidFill>
-                <a:latin typeface="Calibri" panose="020F0502020204030204" pitchFamily="34" charset="0"/>
-                <a:ea typeface="Calibri" panose="020F0502020204030204" pitchFamily="34" charset="-122"/>
-                <a:cs typeface="Calibri" panose="020F0502020204030204" pitchFamily="34" charset="-120"/>
-              </a:rPr>
-              <a:t>· 多策略横向对比矩阵（6种算法）</a:t>
-            </a:r>
-            <a:endParaRPr lang="en-US" sz="1000" dirty="0"/>
-          </a:p>
-          <a:p>
-            <a:pPr marL="0" indent="0">
-              <a:buNone/>
-            </a:pPr>
-            <a:r>
-              <a:rPr lang="en-US" sz="1000" dirty="0">
-                <a:solidFill>
-                  <a:srgbClr val="1E293B"/>
-                </a:solidFill>
-                <a:latin typeface="Calibri" panose="020F0502020204030204" pitchFamily="34" charset="0"/>
-                <a:ea typeface="Calibri" panose="020F0502020204030204" pitchFamily="34" charset="-122"/>
-                <a:cs typeface="Calibri" panose="020F0502020204030204" pitchFamily="34" charset="-120"/>
-              </a:rPr>
-              <a:t>· 调度功率 vs 实际功率逐点对比图</a:t>
-            </a:r>
-            <a:endParaRPr lang="en-US" sz="1000" dirty="0"/>
-          </a:p>
-          <a:p>
-            <a:pPr marL="0" indent="0">
-              <a:buNone/>
-            </a:pPr>
-            <a:r>
-              <a:rPr lang="en-US" sz="1000" dirty="0">
-                <a:solidFill>
-                  <a:srgbClr val="1E293B"/>
-                </a:solidFill>
-                <a:latin typeface="Calibri" panose="020F0502020204030204" pitchFamily="34" charset="0"/>
-                <a:ea typeface="Calibri" panose="020F0502020204030204" pitchFamily="34" charset="-122"/>
-                <a:cs typeface="Calibri" panose="020F0502020204030204" pitchFamily="34" charset="-120"/>
-              </a:rPr>
-              <a:t>· 各策略累计收益 / 事故率 / 能量利用率</a:t>
-            </a:r>
-            <a:endParaRPr lang="en-US" sz="1000" dirty="0"/>
-          </a:p>
-          <a:p>
-            <a:pPr marL="0" indent="0">
-              <a:buNone/>
-            </a:pPr>
-            <a:r>
-              <a:rPr lang="en-US" sz="1000" dirty="0">
-                <a:solidFill>
-                  <a:srgbClr val="1E293B"/>
-                </a:solidFill>
-                <a:latin typeface="Calibri" panose="020F0502020204030204" pitchFamily="34" charset="0"/>
-                <a:ea typeface="Calibri" panose="020F0502020204030204" pitchFamily="34" charset="-122"/>
-                <a:cs typeface="Calibri" panose="020F0502020204030204" pitchFamily="34" charset="-120"/>
-              </a:rPr>
-              <a:t>· 可自定义算法接入的实验框架</a:t>
-            </a:r>
-            <a:endParaRPr lang="en-US" sz="1000" dirty="0"/>
-          </a:p>
-        </p:txBody>
-      </p:sp>
-      <p:pic>
-        <p:nvPicPr>
-          <p:cNvPr id="23" name="图片 22"/>
-          <p:cNvPicPr>
-            <a:picLocks noChangeAspect="1"/>
-          </p:cNvPicPr>
-          <p:nvPr>
-            <p:custDataLst>
-              <p:tags r:id="rId20"/>
-            </p:custDataLst>
-          </p:nvPr>
-        </p:nvPicPr>
-        <p:blipFill>
-          <a:blip r:embed="rId21"/>
-          <a:stretch>
-            <a:fillRect/>
-          </a:stretch>
-        </p:blipFill>
-        <p:spPr>
-          <a:xfrm>
-            <a:off x="287020" y="1079500"/>
-            <a:ext cx="4271645" cy="2413635"/>
-          </a:xfrm>
-          <a:prstGeom prst="rect">
-            <a:avLst/>
-          </a:prstGeom>
-        </p:spPr>
-      </p:pic>
-      <p:pic>
-        <p:nvPicPr>
-          <p:cNvPr id="26" name="图片 25"/>
-          <p:cNvPicPr>
-            <a:picLocks noChangeAspect="1"/>
-          </p:cNvPicPr>
-          <p:nvPr/>
-        </p:nvPicPr>
-        <p:blipFill>
-          <a:blip r:embed="rId22"/>
-          <a:stretch>
-            <a:fillRect/>
-          </a:stretch>
-        </p:blipFill>
-        <p:spPr>
-          <a:xfrm>
-            <a:off x="4736465" y="1072515"/>
-            <a:ext cx="4732020" cy="2420620"/>
+            <a:off x="1558925" y="804545"/>
+            <a:ext cx="5751830" cy="3398520"/>
           </a:xfrm>
           <a:prstGeom prst="rect">
             <a:avLst/>
@@ -6796,7 +6291,7 @@
                 <a:ea typeface="Calibri" panose="020F0502020204030204" pitchFamily="34" charset="-122"/>
                 <a:cs typeface="Calibri" panose="020F0502020204030204" pitchFamily="34" charset="-120"/>
               </a:rPr>
-              <a:t>系统演示 — 智能问答 &amp; 预测上传</a:t>
+              <a:t>系统演示 — 站点驾驶舱 &amp; 算法实验</a:t>
             </a:r>
             <a:endParaRPr lang="en-US" sz="2600" dirty="0"/>
           </a:p>
@@ -6834,7 +6329,7 @@
                 <a:ea typeface="Consolas" panose="020B0609020204030204" pitchFamily="34" charset="-122"/>
                 <a:cs typeface="Consolas" panose="020B0609020204030204" pitchFamily="34" charset="-120"/>
               </a:rPr>
-              <a:t>/agent</a:t>
+              <a:t>/sites</a:t>
             </a:r>
             <a:endParaRPr lang="en-US" sz="1000" dirty="0"/>
           </a:p>
@@ -6946,7 +6441,7 @@
                 <a:ea typeface="Calibri" panose="020F0502020204030204" pitchFamily="34" charset="-122"/>
                 <a:cs typeface="Calibri" panose="020F0502020204030204" pitchFamily="34" charset="-120"/>
               </a:rPr>
-              <a:t>智能体中心截图</a:t>
+              <a:t>站点驾驶舱截图</a:t>
             </a:r>
             <a:endParaRPr lang="en-US" sz="900" dirty="0"/>
           </a:p>
@@ -6963,7 +6458,7 @@
                 <a:ea typeface="Calibri" panose="020F0502020204030204" pitchFamily="34" charset="-122"/>
                 <a:cs typeface="Calibri" panose="020F0502020204030204" pitchFamily="34" charset="-120"/>
               </a:rPr>
-              <a:t>Ollama LLM 问答界面 + 快捷提问按钮</a:t>
+              <a:t>预测vs实际功率曲线 + 风险带 + 日汇总</a:t>
             </a:r>
             <a:endParaRPr lang="en-US" sz="900" dirty="0"/>
           </a:p>
@@ -7018,7 +6513,7 @@
             <a:avLst/>
           </a:prstGeom>
           <a:solidFill>
-            <a:srgbClr val="059669"/>
+            <a:srgbClr val="2563EB"/>
           </a:solidFill>
         </p:spPr>
       </p:sp>
@@ -7086,7 +6581,7 @@
                 <a:ea typeface="Calibri" panose="020F0502020204030204" pitchFamily="34" charset="-122"/>
                 <a:cs typeface="Calibri" panose="020F0502020204030204" pitchFamily="34" charset="-120"/>
               </a:rPr>
-              <a:t>智能体中心</a:t>
+              <a:t>站点驾驶舱</a:t>
             </a:r>
             <a:endParaRPr lang="en-US" sz="1400" dirty="0"/>
           </a:p>
@@ -7128,7 +6623,7 @@
                 <a:ea typeface="Calibri" panose="020F0502020204030204" pitchFamily="34" charset="-122"/>
                 <a:cs typeface="Calibri" panose="020F0502020204030204" pitchFamily="34" charset="-120"/>
               </a:rPr>
-              <a:t>· Ollama LLM 本地模型优先问答</a:t>
+              <a:t>· 风场地图 + 站点切换</a:t>
             </a:r>
             <a:endParaRPr lang="en-US" sz="1000" dirty="0"/>
           </a:p>
@@ -7145,7 +6640,7 @@
                 <a:ea typeface="Calibri" panose="020F0502020204030204" pitchFamily="34" charset="-122"/>
                 <a:cs typeface="Calibri" panose="020F0502020204030204" pitchFamily="34" charset="-120"/>
               </a:rPr>
-              <a:t>· 不可用时自动回退内置规则问答</a:t>
+              <a:t>· 预测 vs 真实功率时序对比曲线</a:t>
             </a:r>
             <a:endParaRPr lang="en-US" sz="1000" dirty="0"/>
           </a:p>
@@ -7162,7 +6657,7 @@
                 <a:ea typeface="Calibri" panose="020F0502020204030204" pitchFamily="34" charset="-122"/>
                 <a:cs typeface="Calibri" panose="020F0502020204030204" pitchFamily="34" charset="-120"/>
               </a:rPr>
-              <a:t>· 支持预测/风险/调度/站点等话题</a:t>
+              <a:t>· 风险带 + 日汇总统计表格</a:t>
             </a:r>
             <a:endParaRPr lang="en-US" sz="1000" dirty="0"/>
           </a:p>
@@ -7179,7 +6674,7 @@
                 <a:ea typeface="Calibri" panose="020F0502020204030204" pitchFamily="34" charset="-122"/>
                 <a:cs typeface="Calibri" panose="020F0502020204030204" pitchFamily="34" charset="-120"/>
               </a:rPr>
-              <a:t>· 一键导出 CSV / JSON 数据报告</a:t>
+              <a:t>· 高风险窗口 Top 10 标注</a:t>
             </a:r>
             <a:endParaRPr lang="en-US" sz="1000" dirty="0"/>
           </a:p>
@@ -7217,7 +6712,7 @@
                 <a:ea typeface="Consolas" panose="020B0609020204030204" pitchFamily="34" charset="-122"/>
                 <a:cs typeface="Consolas" panose="020B0609020204030204" pitchFamily="34" charset="-120"/>
               </a:rPr>
-              <a:t>/prediction</a:t>
+              <a:t>/experiments</a:t>
             </a:r>
             <a:endParaRPr lang="en-US" sz="1000" dirty="0"/>
           </a:p>
@@ -7329,7 +6824,7 @@
                 <a:ea typeface="Calibri" panose="020F0502020204030204" pitchFamily="34" charset="-122"/>
                 <a:cs typeface="Calibri" panose="020F0502020204030204" pitchFamily="34" charset="-120"/>
               </a:rPr>
-              <a:t>预测上传页截图</a:t>
+              <a:t>算法实验页截图</a:t>
             </a:r>
             <a:endParaRPr lang="en-US" sz="900" dirty="0"/>
           </a:p>
@@ -7346,7 +6841,7 @@
                 <a:ea typeface="Calibri" panose="020F0502020204030204" pitchFamily="34" charset="-122"/>
                 <a:cs typeface="Calibri" panose="020F0502020204030204" pitchFamily="34" charset="-120"/>
               </a:rPr>
-              <a:t>CSV 上传 → 在线预测 → 结果展示</a:t>
+              <a:t>多策略对比卡片 + 调度功率 vs 实际功率</a:t>
             </a:r>
             <a:endParaRPr lang="en-US" sz="900" dirty="0"/>
           </a:p>
@@ -7401,7 +6896,7 @@
             <a:avLst/>
           </a:prstGeom>
           <a:solidFill>
-            <a:srgbClr val="000000"/>
+            <a:srgbClr val="7C3AED"/>
           </a:solidFill>
         </p:spPr>
       </p:sp>
@@ -7469,7 +6964,7 @@
                 <a:ea typeface="Calibri" panose="020F0502020204030204" pitchFamily="34" charset="-122"/>
                 <a:cs typeface="Calibri" panose="020F0502020204030204" pitchFamily="34" charset="-120"/>
               </a:rPr>
-              <a:t>预测上传页</a:t>
+              <a:t>算法实验页</a:t>
             </a:r>
             <a:endParaRPr lang="en-US" sz="1400" dirty="0"/>
           </a:p>
@@ -7511,7 +7006,7 @@
                 <a:ea typeface="Calibri" panose="020F0502020204030204" pitchFamily="34" charset="-122"/>
                 <a:cs typeface="Calibri" panose="020F0502020204030204" pitchFamily="34" charset="-120"/>
               </a:rPr>
-              <a:t>· 上传新测试集 CSV → 在线预测</a:t>
+              <a:t>· 多策略横向对比矩阵（6种算法）</a:t>
             </a:r>
             <a:endParaRPr lang="en-US" sz="1000" dirty="0"/>
           </a:p>
@@ -7528,7 +7023,7 @@
                 <a:ea typeface="Calibri" panose="020F0502020204030204" pitchFamily="34" charset="-122"/>
                 <a:cs typeface="Calibri" panose="020F0502020204030204" pitchFamily="34" charset="-120"/>
               </a:rPr>
-              <a:t>· 多站点结果对比 + 调度建议</a:t>
+              <a:t>· 调度功率 vs 实际功率逐点对比图</a:t>
             </a:r>
             <a:endParaRPr lang="en-US" sz="1000" dirty="0"/>
           </a:p>
@@ -7545,7 +7040,7 @@
                 <a:ea typeface="Calibri" panose="020F0502020204030204" pitchFamily="34" charset="-122"/>
                 <a:cs typeface="Calibri" panose="020F0502020204030204" pitchFamily="34" charset="-120"/>
               </a:rPr>
-              <a:t>· 含真实功率时可自动计算精度指标</a:t>
+              <a:t>· 各策略累计收益 / 事故率 / 能量利用率</a:t>
             </a:r>
             <a:endParaRPr lang="en-US" sz="1000" dirty="0"/>
           </a:p>
@@ -7562,7 +7057,7 @@
                 <a:ea typeface="Calibri" panose="020F0502020204030204" pitchFamily="34" charset="-122"/>
                 <a:cs typeface="Calibri" panose="020F0502020204030204" pitchFamily="34" charset="-120"/>
               </a:rPr>
-              <a:t>· 结果 CSV 下载 / 历史上传管理</a:t>
+              <a:t>· 可自定义算法接入的实验框架</a:t>
             </a:r>
             <a:endParaRPr lang="en-US" sz="1000" dirty="0"/>
           </a:p>
@@ -7570,35 +7065,15 @@
       </p:sp>
       <p:pic>
         <p:nvPicPr>
-          <p:cNvPr id="24" name="图片 23"/>
+          <p:cNvPr id="23" name="图片 22"/>
           <p:cNvPicPr>
             <a:picLocks noChangeAspect="1"/>
           </p:cNvPicPr>
-          <p:nvPr/>
-        </p:nvPicPr>
-        <p:blipFill>
-          <a:blip r:embed="rId20"/>
-          <a:stretch>
-            <a:fillRect/>
-          </a:stretch>
-        </p:blipFill>
-        <p:spPr>
-          <a:xfrm>
-            <a:off x="200660" y="1005840"/>
-            <a:ext cx="4445000" cy="2456815"/>
-          </a:xfrm>
-          <a:prstGeom prst="rect">
-            <a:avLst/>
-          </a:prstGeom>
-        </p:spPr>
-      </p:pic>
-      <p:pic>
-        <p:nvPicPr>
-          <p:cNvPr id="25" name="图片 24"/>
-          <p:cNvPicPr>
-            <a:picLocks noChangeAspect="1"/>
-          </p:cNvPicPr>
-          <p:nvPr/>
+          <p:nvPr>
+            <p:custDataLst>
+              <p:tags r:id="rId20"/>
+            </p:custDataLst>
+          </p:nvPr>
         </p:nvPicPr>
         <p:blipFill>
           <a:blip r:embed="rId21"/>
@@ -7608,8 +7083,32 @@
         </p:blipFill>
         <p:spPr>
           <a:xfrm>
-            <a:off x="4809490" y="1005840"/>
-            <a:ext cx="4191635" cy="2456815"/>
+            <a:off x="287020" y="1079500"/>
+            <a:ext cx="4271645" cy="2413635"/>
+          </a:xfrm>
+          <a:prstGeom prst="rect">
+            <a:avLst/>
+          </a:prstGeom>
+        </p:spPr>
+      </p:pic>
+      <p:pic>
+        <p:nvPicPr>
+          <p:cNvPr id="26" name="图片 25"/>
+          <p:cNvPicPr>
+            <a:picLocks noChangeAspect="1"/>
+          </p:cNvPicPr>
+          <p:nvPr/>
+        </p:nvPicPr>
+        <p:blipFill>
+          <a:blip r:embed="rId22"/>
+          <a:stretch>
+            <a:fillRect/>
+          </a:stretch>
+        </p:blipFill>
+        <p:spPr>
+          <a:xfrm>
+            <a:off x="4736465" y="1072515"/>
+            <a:ext cx="4732020" cy="2420620"/>
           </a:xfrm>
           <a:prstGeom prst="rect">
             <a:avLst/>
@@ -7673,6 +7172,891 @@
               <a:buNone/>
             </a:pPr>
             <a:r>
+              <a:rPr lang="en-US" sz="2600" b="1" dirty="0">
+                <a:solidFill>
+                  <a:srgbClr val="1E293B"/>
+                </a:solidFill>
+                <a:latin typeface="Calibri" panose="020F0502020204030204" pitchFamily="34" charset="0"/>
+                <a:ea typeface="Calibri" panose="020F0502020204030204" pitchFamily="34" charset="-122"/>
+                <a:cs typeface="Calibri" panose="020F0502020204030204" pitchFamily="34" charset="-120"/>
+              </a:rPr>
+              <a:t>系统演示 — 智能问答 &amp; 预测上传</a:t>
+            </a:r>
+            <a:endParaRPr lang="en-US" sz="2600" dirty="0"/>
+          </a:p>
+        </p:txBody>
+      </p:sp>
+      <p:sp>
+        <p:nvSpPr>
+          <p:cNvPr id="3" name="Text 1"/>
+          <p:cNvSpPr/>
+          <p:nvPr/>
+        </p:nvSpPr>
+        <p:spPr>
+          <a:xfrm>
+            <a:off x="548640" y="777240"/>
+            <a:ext cx="1828800" cy="228600"/>
+          </a:xfrm>
+          <a:prstGeom prst="rect">
+            <a:avLst/>
+          </a:prstGeom>
+          <a:noFill/>
+        </p:spPr>
+        <p:txBody>
+          <a:bodyPr wrap="square" lIns="0" tIns="0" rIns="0" bIns="0" rtlCol="0" anchor="ctr"/>
+          <a:lstStyle/>
+          <a:p>
+            <a:pPr marL="0" indent="0">
+              <a:buNone/>
+            </a:pPr>
+            <a:r>
+              <a:rPr lang="en-US" sz="1000" dirty="0">
+                <a:solidFill>
+                  <a:srgbClr val="64748B"/>
+                </a:solidFill>
+                <a:latin typeface="Consolas" panose="020B0609020204030204" pitchFamily="34" charset="0"/>
+                <a:ea typeface="Consolas" panose="020B0609020204030204" pitchFamily="34" charset="-122"/>
+                <a:cs typeface="Consolas" panose="020B0609020204030204" pitchFamily="34" charset="-120"/>
+              </a:rPr>
+              <a:t>/agent</a:t>
+            </a:r>
+            <a:endParaRPr lang="en-US" sz="1000" dirty="0"/>
+          </a:p>
+        </p:txBody>
+      </p:sp>
+      <p:pic>
+        <p:nvPicPr>
+          <p:cNvPr id="5" name="Image 0" descr="preencoded.png"/>
+          <p:cNvPicPr>
+            <a:picLocks noChangeAspect="1"/>
+          </p:cNvPicPr>
+          <p:nvPr>
+            <p:custDataLst>
+              <p:tags r:id="rId1"/>
+            </p:custDataLst>
+          </p:nvPr>
+        </p:nvPicPr>
+        <p:blipFill>
+          <a:blip r:embed="rId2"/>
+          <a:stretch>
+            <a:fillRect/>
+          </a:stretch>
+        </p:blipFill>
+        <p:spPr>
+          <a:xfrm>
+            <a:off x="2148840" y="1851660"/>
+            <a:ext cx="548640" cy="548640"/>
+          </a:xfrm>
+          <a:prstGeom prst="rect">
+            <a:avLst/>
+          </a:prstGeom>
+        </p:spPr>
+      </p:pic>
+      <p:sp>
+        <p:nvSpPr>
+          <p:cNvPr id="6" name="Text 3"/>
+          <p:cNvSpPr/>
+          <p:nvPr>
+            <p:custDataLst>
+              <p:tags r:id="rId3"/>
+            </p:custDataLst>
+          </p:nvPr>
+        </p:nvSpPr>
+        <p:spPr>
+          <a:xfrm>
+            <a:off x="457200" y="2446020"/>
+            <a:ext cx="3931920" cy="274320"/>
+          </a:xfrm>
+          <a:prstGeom prst="rect">
+            <a:avLst/>
+          </a:prstGeom>
+          <a:noFill/>
+        </p:spPr>
+        <p:txBody>
+          <a:bodyPr wrap="square" lIns="0" tIns="0" rIns="0" bIns="0" rtlCol="0" anchor="ctr"/>
+          <a:lstStyle/>
+          <a:p>
+            <a:pPr marL="0" indent="0" algn="ctr">
+              <a:buNone/>
+            </a:pPr>
+            <a:r>
+              <a:rPr lang="en-US" sz="1200" b="1" dirty="0">
+                <a:solidFill>
+                  <a:srgbClr val="1C7293"/>
+                </a:solidFill>
+                <a:latin typeface="Calibri" panose="020F0502020204030204" pitchFamily="34" charset="0"/>
+                <a:ea typeface="Calibri" panose="020F0502020204030204" pitchFamily="34" charset="-122"/>
+                <a:cs typeface="Calibri" panose="020F0502020204030204" pitchFamily="34" charset="-120"/>
+              </a:rPr>
+              <a:t>【截图占位】</a:t>
+            </a:r>
+            <a:endParaRPr lang="en-US" sz="1200" dirty="0"/>
+          </a:p>
+        </p:txBody>
+      </p:sp>
+      <p:sp>
+        <p:nvSpPr>
+          <p:cNvPr id="7" name="Text 4"/>
+          <p:cNvSpPr/>
+          <p:nvPr>
+            <p:custDataLst>
+              <p:tags r:id="rId4"/>
+            </p:custDataLst>
+          </p:nvPr>
+        </p:nvSpPr>
+        <p:spPr>
+          <a:xfrm>
+            <a:off x="457200" y="2720340"/>
+            <a:ext cx="3931920" cy="228600"/>
+          </a:xfrm>
+          <a:prstGeom prst="rect">
+            <a:avLst/>
+          </a:prstGeom>
+          <a:noFill/>
+        </p:spPr>
+        <p:txBody>
+          <a:bodyPr wrap="square" lIns="0" tIns="0" rIns="0" bIns="0" rtlCol="0" anchor="ctr"/>
+          <a:lstStyle/>
+          <a:p>
+            <a:pPr marL="0" indent="0" algn="ctr">
+              <a:buNone/>
+            </a:pPr>
+            <a:r>
+              <a:rPr lang="en-US" sz="900" dirty="0">
+                <a:solidFill>
+                  <a:srgbClr val="64748B"/>
+                </a:solidFill>
+                <a:latin typeface="Calibri" panose="020F0502020204030204" pitchFamily="34" charset="0"/>
+                <a:ea typeface="Calibri" panose="020F0502020204030204" pitchFamily="34" charset="-122"/>
+                <a:cs typeface="Calibri" panose="020F0502020204030204" pitchFamily="34" charset="-120"/>
+              </a:rPr>
+              <a:t>智能体中心截图</a:t>
+            </a:r>
+            <a:endParaRPr lang="en-US" sz="900" dirty="0"/>
+          </a:p>
+          <a:p>
+            <a:pPr marL="0" indent="0" algn="ctr">
+              <a:buNone/>
+            </a:pPr>
+            <a:r>
+              <a:rPr lang="en-US" sz="900" dirty="0">
+                <a:solidFill>
+                  <a:srgbClr val="64748B"/>
+                </a:solidFill>
+                <a:latin typeface="Calibri" panose="020F0502020204030204" pitchFamily="34" charset="0"/>
+                <a:ea typeface="Calibri" panose="020F0502020204030204" pitchFamily="34" charset="-122"/>
+                <a:cs typeface="Calibri" panose="020F0502020204030204" pitchFamily="34" charset="-120"/>
+              </a:rPr>
+              <a:t>Ollama LLM 问答界面 + 快捷提问按钮</a:t>
+            </a:r>
+            <a:endParaRPr lang="en-US" sz="900" dirty="0"/>
+          </a:p>
+        </p:txBody>
+      </p:sp>
+      <p:sp>
+        <p:nvSpPr>
+          <p:cNvPr id="8" name="Shape 5"/>
+          <p:cNvSpPr/>
+          <p:nvPr>
+            <p:custDataLst>
+              <p:tags r:id="rId5"/>
+            </p:custDataLst>
+          </p:nvPr>
+        </p:nvSpPr>
+        <p:spPr>
+          <a:xfrm>
+            <a:off x="457200" y="3657600"/>
+            <a:ext cx="3931920" cy="1325880"/>
+          </a:xfrm>
+          <a:prstGeom prst="rect">
+            <a:avLst/>
+          </a:prstGeom>
+          <a:solidFill>
+            <a:srgbClr val="FFFFFF"/>
+          </a:solidFill>
+          <a:effectLst>
+            <a:outerShdw blurRad="50800" dist="25400" dir="8100000" algn="bl" rotWithShape="0">
+              <a:srgbClr val="000000">
+                <a:alpha val="8000"/>
+              </a:srgbClr>
+            </a:outerShdw>
+          </a:effectLst>
+        </p:spPr>
+      </p:sp>
+      <p:sp>
+        <p:nvSpPr>
+          <p:cNvPr id="9" name="Shape 6"/>
+          <p:cNvSpPr/>
+          <p:nvPr>
+            <p:custDataLst>
+              <p:tags r:id="rId6"/>
+            </p:custDataLst>
+          </p:nvPr>
+        </p:nvSpPr>
+        <p:spPr>
+          <a:xfrm>
+            <a:off x="457200" y="3657600"/>
+            <a:ext cx="54864" cy="1325880"/>
+          </a:xfrm>
+          <a:prstGeom prst="rect">
+            <a:avLst/>
+          </a:prstGeom>
+          <a:solidFill>
+            <a:srgbClr val="059669"/>
+          </a:solidFill>
+        </p:spPr>
+      </p:sp>
+      <p:pic>
+        <p:nvPicPr>
+          <p:cNvPr id="10" name="Image 1" descr="preencoded.png"/>
+          <p:cNvPicPr>
+            <a:picLocks noChangeAspect="1"/>
+          </p:cNvPicPr>
+          <p:nvPr>
+            <p:custDataLst>
+              <p:tags r:id="rId7"/>
+            </p:custDataLst>
+          </p:nvPr>
+        </p:nvPicPr>
+        <p:blipFill>
+          <a:blip r:embed="rId8"/>
+          <a:stretch>
+            <a:fillRect/>
+          </a:stretch>
+        </p:blipFill>
+        <p:spPr>
+          <a:xfrm>
+            <a:off x="640080" y="3794760"/>
+            <a:ext cx="274320" cy="274320"/>
+          </a:xfrm>
+          <a:prstGeom prst="rect">
+            <a:avLst/>
+          </a:prstGeom>
+        </p:spPr>
+      </p:pic>
+      <p:sp>
+        <p:nvSpPr>
+          <p:cNvPr id="11" name="Text 7"/>
+          <p:cNvSpPr/>
+          <p:nvPr>
+            <p:custDataLst>
+              <p:tags r:id="rId9"/>
+            </p:custDataLst>
+          </p:nvPr>
+        </p:nvSpPr>
+        <p:spPr>
+          <a:xfrm>
+            <a:off x="1051560" y="3794760"/>
+            <a:ext cx="3017520" cy="274320"/>
+          </a:xfrm>
+          <a:prstGeom prst="rect">
+            <a:avLst/>
+          </a:prstGeom>
+          <a:noFill/>
+        </p:spPr>
+        <p:txBody>
+          <a:bodyPr wrap="square" lIns="0" tIns="0" rIns="0" bIns="0" rtlCol="0" anchor="ctr"/>
+          <a:lstStyle/>
+          <a:p>
+            <a:pPr marL="0" indent="0">
+              <a:buNone/>
+            </a:pPr>
+            <a:r>
+              <a:rPr lang="en-US" sz="1400" b="1" dirty="0">
+                <a:solidFill>
+                  <a:srgbClr val="1E293B"/>
+                </a:solidFill>
+                <a:latin typeface="Calibri" panose="020F0502020204030204" pitchFamily="34" charset="0"/>
+                <a:ea typeface="Calibri" panose="020F0502020204030204" pitchFamily="34" charset="-122"/>
+                <a:cs typeface="Calibri" panose="020F0502020204030204" pitchFamily="34" charset="-120"/>
+              </a:rPr>
+              <a:t>智能体中心</a:t>
+            </a:r>
+            <a:endParaRPr lang="en-US" sz="1400" dirty="0"/>
+          </a:p>
+        </p:txBody>
+      </p:sp>
+      <p:sp>
+        <p:nvSpPr>
+          <p:cNvPr id="12" name="Text 8"/>
+          <p:cNvSpPr/>
+          <p:nvPr>
+            <p:custDataLst>
+              <p:tags r:id="rId10"/>
+            </p:custDataLst>
+          </p:nvPr>
+        </p:nvSpPr>
+        <p:spPr>
+          <a:xfrm>
+            <a:off x="640080" y="4160520"/>
+            <a:ext cx="3566160" cy="731520"/>
+          </a:xfrm>
+          <a:prstGeom prst="rect">
+            <a:avLst/>
+          </a:prstGeom>
+          <a:noFill/>
+        </p:spPr>
+        <p:txBody>
+          <a:bodyPr wrap="square" rtlCol="0" anchor="t"/>
+          <a:lstStyle/>
+          <a:p>
+            <a:pPr marL="0" indent="0">
+              <a:buNone/>
+            </a:pPr>
+            <a:r>
+              <a:rPr lang="en-US" sz="1000" dirty="0">
+                <a:solidFill>
+                  <a:srgbClr val="1E293B"/>
+                </a:solidFill>
+                <a:latin typeface="Calibri" panose="020F0502020204030204" pitchFamily="34" charset="0"/>
+                <a:ea typeface="Calibri" panose="020F0502020204030204" pitchFamily="34" charset="-122"/>
+                <a:cs typeface="Calibri" panose="020F0502020204030204" pitchFamily="34" charset="-120"/>
+              </a:rPr>
+              <a:t>· Ollama LLM 本地模型优先问答</a:t>
+            </a:r>
+            <a:endParaRPr lang="en-US" sz="1000" dirty="0"/>
+          </a:p>
+          <a:p>
+            <a:pPr marL="0" indent="0">
+              <a:buNone/>
+            </a:pPr>
+            <a:r>
+              <a:rPr lang="en-US" sz="1000" dirty="0">
+                <a:solidFill>
+                  <a:srgbClr val="1E293B"/>
+                </a:solidFill>
+                <a:latin typeface="Calibri" panose="020F0502020204030204" pitchFamily="34" charset="0"/>
+                <a:ea typeface="Calibri" panose="020F0502020204030204" pitchFamily="34" charset="-122"/>
+                <a:cs typeface="Calibri" panose="020F0502020204030204" pitchFamily="34" charset="-120"/>
+              </a:rPr>
+              <a:t>· 不可用时自动回退内置规则问答</a:t>
+            </a:r>
+            <a:endParaRPr lang="en-US" sz="1000" dirty="0"/>
+          </a:p>
+          <a:p>
+            <a:pPr marL="0" indent="0">
+              <a:buNone/>
+            </a:pPr>
+            <a:r>
+              <a:rPr lang="en-US" sz="1000" dirty="0">
+                <a:solidFill>
+                  <a:srgbClr val="1E293B"/>
+                </a:solidFill>
+                <a:latin typeface="Calibri" panose="020F0502020204030204" pitchFamily="34" charset="0"/>
+                <a:ea typeface="Calibri" panose="020F0502020204030204" pitchFamily="34" charset="-122"/>
+                <a:cs typeface="Calibri" panose="020F0502020204030204" pitchFamily="34" charset="-120"/>
+              </a:rPr>
+              <a:t>· 支持预测/风险/调度/站点等话题</a:t>
+            </a:r>
+            <a:endParaRPr lang="en-US" sz="1000" dirty="0"/>
+          </a:p>
+          <a:p>
+            <a:pPr marL="0" indent="0">
+              <a:buNone/>
+            </a:pPr>
+            <a:r>
+              <a:rPr lang="en-US" sz="1000" dirty="0">
+                <a:solidFill>
+                  <a:srgbClr val="1E293B"/>
+                </a:solidFill>
+                <a:latin typeface="Calibri" panose="020F0502020204030204" pitchFamily="34" charset="0"/>
+                <a:ea typeface="Calibri" panose="020F0502020204030204" pitchFamily="34" charset="-122"/>
+                <a:cs typeface="Calibri" panose="020F0502020204030204" pitchFamily="34" charset="-120"/>
+              </a:rPr>
+              <a:t>· 一键导出 CSV / JSON 数据报告</a:t>
+            </a:r>
+            <a:endParaRPr lang="en-US" sz="1000" dirty="0"/>
+          </a:p>
+        </p:txBody>
+      </p:sp>
+      <p:sp>
+        <p:nvSpPr>
+          <p:cNvPr id="13" name="Text 9"/>
+          <p:cNvSpPr/>
+          <p:nvPr/>
+        </p:nvSpPr>
+        <p:spPr>
+          <a:xfrm>
+            <a:off x="5029200" y="777240"/>
+            <a:ext cx="2743200" cy="228600"/>
+          </a:xfrm>
+          <a:prstGeom prst="rect">
+            <a:avLst/>
+          </a:prstGeom>
+          <a:noFill/>
+        </p:spPr>
+        <p:txBody>
+          <a:bodyPr wrap="square" lIns="0" tIns="0" rIns="0" bIns="0" rtlCol="0" anchor="ctr"/>
+          <a:lstStyle/>
+          <a:p>
+            <a:pPr marL="0" indent="0">
+              <a:buNone/>
+            </a:pPr>
+            <a:r>
+              <a:rPr lang="en-US" sz="1000" dirty="0">
+                <a:solidFill>
+                  <a:srgbClr val="64748B"/>
+                </a:solidFill>
+                <a:latin typeface="Consolas" panose="020B0609020204030204" pitchFamily="34" charset="0"/>
+                <a:ea typeface="Consolas" panose="020B0609020204030204" pitchFamily="34" charset="-122"/>
+                <a:cs typeface="Consolas" panose="020B0609020204030204" pitchFamily="34" charset="-120"/>
+              </a:rPr>
+              <a:t>/prediction</a:t>
+            </a:r>
+            <a:endParaRPr lang="en-US" sz="1000" dirty="0"/>
+          </a:p>
+        </p:txBody>
+      </p:sp>
+      <p:pic>
+        <p:nvPicPr>
+          <p:cNvPr id="15" name="Image 2" descr="preencoded.png"/>
+          <p:cNvPicPr>
+            <a:picLocks noChangeAspect="1"/>
+          </p:cNvPicPr>
+          <p:nvPr>
+            <p:custDataLst>
+              <p:tags r:id="rId11"/>
+            </p:custDataLst>
+          </p:nvPr>
+        </p:nvPicPr>
+        <p:blipFill>
+          <a:blip r:embed="rId2"/>
+          <a:stretch>
+            <a:fillRect/>
+          </a:stretch>
+        </p:blipFill>
+        <p:spPr>
+          <a:xfrm>
+            <a:off x="6446520" y="1851660"/>
+            <a:ext cx="548640" cy="548640"/>
+          </a:xfrm>
+          <a:prstGeom prst="rect">
+            <a:avLst/>
+          </a:prstGeom>
+        </p:spPr>
+      </p:pic>
+      <p:sp>
+        <p:nvSpPr>
+          <p:cNvPr id="16" name="Text 11"/>
+          <p:cNvSpPr/>
+          <p:nvPr>
+            <p:custDataLst>
+              <p:tags r:id="rId12"/>
+            </p:custDataLst>
+          </p:nvPr>
+        </p:nvSpPr>
+        <p:spPr>
+          <a:xfrm>
+            <a:off x="4754880" y="2446020"/>
+            <a:ext cx="3931920" cy="274320"/>
+          </a:xfrm>
+          <a:prstGeom prst="rect">
+            <a:avLst/>
+          </a:prstGeom>
+          <a:noFill/>
+        </p:spPr>
+        <p:txBody>
+          <a:bodyPr wrap="square" lIns="0" tIns="0" rIns="0" bIns="0" rtlCol="0" anchor="ctr"/>
+          <a:lstStyle/>
+          <a:p>
+            <a:pPr marL="0" indent="0" algn="ctr">
+              <a:buNone/>
+            </a:pPr>
+            <a:r>
+              <a:rPr lang="en-US" sz="1200" b="1" dirty="0">
+                <a:solidFill>
+                  <a:srgbClr val="1C7293"/>
+                </a:solidFill>
+                <a:latin typeface="Calibri" panose="020F0502020204030204" pitchFamily="34" charset="0"/>
+                <a:ea typeface="Calibri" panose="020F0502020204030204" pitchFamily="34" charset="-122"/>
+                <a:cs typeface="Calibri" panose="020F0502020204030204" pitchFamily="34" charset="-120"/>
+              </a:rPr>
+              <a:t>【截图占位】</a:t>
+            </a:r>
+            <a:endParaRPr lang="en-US" sz="1200" dirty="0"/>
+          </a:p>
+        </p:txBody>
+      </p:sp>
+      <p:sp>
+        <p:nvSpPr>
+          <p:cNvPr id="17" name="Text 12"/>
+          <p:cNvSpPr/>
+          <p:nvPr>
+            <p:custDataLst>
+              <p:tags r:id="rId13"/>
+            </p:custDataLst>
+          </p:nvPr>
+        </p:nvSpPr>
+        <p:spPr>
+          <a:xfrm>
+            <a:off x="4754880" y="2720340"/>
+            <a:ext cx="3931920" cy="228600"/>
+          </a:xfrm>
+          <a:prstGeom prst="rect">
+            <a:avLst/>
+          </a:prstGeom>
+          <a:noFill/>
+        </p:spPr>
+        <p:txBody>
+          <a:bodyPr wrap="square" lIns="0" tIns="0" rIns="0" bIns="0" rtlCol="0" anchor="ctr"/>
+          <a:lstStyle/>
+          <a:p>
+            <a:pPr marL="0" indent="0" algn="ctr">
+              <a:buNone/>
+            </a:pPr>
+            <a:r>
+              <a:rPr lang="en-US" sz="900" dirty="0">
+                <a:solidFill>
+                  <a:srgbClr val="64748B"/>
+                </a:solidFill>
+                <a:latin typeface="Calibri" panose="020F0502020204030204" pitchFamily="34" charset="0"/>
+                <a:ea typeface="Calibri" panose="020F0502020204030204" pitchFamily="34" charset="-122"/>
+                <a:cs typeface="Calibri" panose="020F0502020204030204" pitchFamily="34" charset="-120"/>
+              </a:rPr>
+              <a:t>预测上传页截图</a:t>
+            </a:r>
+            <a:endParaRPr lang="en-US" sz="900" dirty="0"/>
+          </a:p>
+          <a:p>
+            <a:pPr marL="0" indent="0" algn="ctr">
+              <a:buNone/>
+            </a:pPr>
+            <a:r>
+              <a:rPr lang="en-US" sz="900" dirty="0">
+                <a:solidFill>
+                  <a:srgbClr val="64748B"/>
+                </a:solidFill>
+                <a:latin typeface="Calibri" panose="020F0502020204030204" pitchFamily="34" charset="0"/>
+                <a:ea typeface="Calibri" panose="020F0502020204030204" pitchFamily="34" charset="-122"/>
+                <a:cs typeface="Calibri" panose="020F0502020204030204" pitchFamily="34" charset="-120"/>
+              </a:rPr>
+              <a:t>CSV 上传 → 在线预测 → 结果展示</a:t>
+            </a:r>
+            <a:endParaRPr lang="en-US" sz="900" dirty="0"/>
+          </a:p>
+        </p:txBody>
+      </p:sp>
+      <p:sp>
+        <p:nvSpPr>
+          <p:cNvPr id="18" name="Shape 13"/>
+          <p:cNvSpPr/>
+          <p:nvPr>
+            <p:custDataLst>
+              <p:tags r:id="rId14"/>
+            </p:custDataLst>
+          </p:nvPr>
+        </p:nvSpPr>
+        <p:spPr>
+          <a:xfrm>
+            <a:off x="4754880" y="3657600"/>
+            <a:ext cx="3931920" cy="1325880"/>
+          </a:xfrm>
+          <a:prstGeom prst="rect">
+            <a:avLst/>
+          </a:prstGeom>
+          <a:solidFill>
+            <a:srgbClr val="FFFFFF"/>
+          </a:solidFill>
+          <a:effectLst>
+            <a:outerShdw blurRad="50800" dist="25400" dir="8100000" algn="bl" rotWithShape="0">
+              <a:srgbClr val="000000">
+                <a:alpha val="8000"/>
+              </a:srgbClr>
+            </a:outerShdw>
+          </a:effectLst>
+        </p:spPr>
+      </p:sp>
+      <p:sp>
+        <p:nvSpPr>
+          <p:cNvPr id="19" name="Shape 14"/>
+          <p:cNvSpPr/>
+          <p:nvPr>
+            <p:custDataLst>
+              <p:tags r:id="rId15"/>
+            </p:custDataLst>
+          </p:nvPr>
+        </p:nvSpPr>
+        <p:spPr>
+          <a:xfrm>
+            <a:off x="4754880" y="3657600"/>
+            <a:ext cx="54864" cy="1325880"/>
+          </a:xfrm>
+          <a:prstGeom prst="rect">
+            <a:avLst/>
+          </a:prstGeom>
+          <a:solidFill>
+            <a:srgbClr val="000000"/>
+          </a:solidFill>
+        </p:spPr>
+      </p:sp>
+      <p:pic>
+        <p:nvPicPr>
+          <p:cNvPr id="20" name="Image 3" descr="preencoded.png"/>
+          <p:cNvPicPr>
+            <a:picLocks noChangeAspect="1"/>
+          </p:cNvPicPr>
+          <p:nvPr>
+            <p:custDataLst>
+              <p:tags r:id="rId16"/>
+            </p:custDataLst>
+          </p:nvPr>
+        </p:nvPicPr>
+        <p:blipFill>
+          <a:blip r:embed="rId17"/>
+          <a:stretch>
+            <a:fillRect/>
+          </a:stretch>
+        </p:blipFill>
+        <p:spPr>
+          <a:xfrm>
+            <a:off x="4937760" y="3794760"/>
+            <a:ext cx="274320" cy="274320"/>
+          </a:xfrm>
+          <a:prstGeom prst="rect">
+            <a:avLst/>
+          </a:prstGeom>
+        </p:spPr>
+      </p:pic>
+      <p:sp>
+        <p:nvSpPr>
+          <p:cNvPr id="21" name="Text 15"/>
+          <p:cNvSpPr/>
+          <p:nvPr>
+            <p:custDataLst>
+              <p:tags r:id="rId18"/>
+            </p:custDataLst>
+          </p:nvPr>
+        </p:nvSpPr>
+        <p:spPr>
+          <a:xfrm>
+            <a:off x="5349240" y="3794760"/>
+            <a:ext cx="3017520" cy="274320"/>
+          </a:xfrm>
+          <a:prstGeom prst="rect">
+            <a:avLst/>
+          </a:prstGeom>
+          <a:noFill/>
+        </p:spPr>
+        <p:txBody>
+          <a:bodyPr wrap="square" lIns="0" tIns="0" rIns="0" bIns="0" rtlCol="0" anchor="ctr"/>
+          <a:lstStyle/>
+          <a:p>
+            <a:pPr marL="0" indent="0">
+              <a:buNone/>
+            </a:pPr>
+            <a:r>
+              <a:rPr lang="en-US" sz="1400" b="1" dirty="0">
+                <a:solidFill>
+                  <a:srgbClr val="1E293B"/>
+                </a:solidFill>
+                <a:latin typeface="Calibri" panose="020F0502020204030204" pitchFamily="34" charset="0"/>
+                <a:ea typeface="Calibri" panose="020F0502020204030204" pitchFamily="34" charset="-122"/>
+                <a:cs typeface="Calibri" panose="020F0502020204030204" pitchFamily="34" charset="-120"/>
+              </a:rPr>
+              <a:t>预测上传页</a:t>
+            </a:r>
+            <a:endParaRPr lang="en-US" sz="1400" dirty="0"/>
+          </a:p>
+        </p:txBody>
+      </p:sp>
+      <p:sp>
+        <p:nvSpPr>
+          <p:cNvPr id="22" name="Text 16"/>
+          <p:cNvSpPr/>
+          <p:nvPr>
+            <p:custDataLst>
+              <p:tags r:id="rId19"/>
+            </p:custDataLst>
+          </p:nvPr>
+        </p:nvSpPr>
+        <p:spPr>
+          <a:xfrm>
+            <a:off x="4937760" y="4160520"/>
+            <a:ext cx="3566160" cy="731520"/>
+          </a:xfrm>
+          <a:prstGeom prst="rect">
+            <a:avLst/>
+          </a:prstGeom>
+          <a:noFill/>
+        </p:spPr>
+        <p:txBody>
+          <a:bodyPr wrap="square" rtlCol="0" anchor="t"/>
+          <a:lstStyle/>
+          <a:p>
+            <a:pPr marL="0" indent="0">
+              <a:buNone/>
+            </a:pPr>
+            <a:r>
+              <a:rPr lang="en-US" sz="1000" dirty="0">
+                <a:solidFill>
+                  <a:srgbClr val="1E293B"/>
+                </a:solidFill>
+                <a:latin typeface="Calibri" panose="020F0502020204030204" pitchFamily="34" charset="0"/>
+                <a:ea typeface="Calibri" panose="020F0502020204030204" pitchFamily="34" charset="-122"/>
+                <a:cs typeface="Calibri" panose="020F0502020204030204" pitchFamily="34" charset="-120"/>
+              </a:rPr>
+              <a:t>· 上传新测试集 CSV → 在线预测</a:t>
+            </a:r>
+            <a:endParaRPr lang="en-US" sz="1000" dirty="0"/>
+          </a:p>
+          <a:p>
+            <a:pPr marL="0" indent="0">
+              <a:buNone/>
+            </a:pPr>
+            <a:r>
+              <a:rPr lang="en-US" sz="1000" dirty="0">
+                <a:solidFill>
+                  <a:srgbClr val="1E293B"/>
+                </a:solidFill>
+                <a:latin typeface="Calibri" panose="020F0502020204030204" pitchFamily="34" charset="0"/>
+                <a:ea typeface="Calibri" panose="020F0502020204030204" pitchFamily="34" charset="-122"/>
+                <a:cs typeface="Calibri" panose="020F0502020204030204" pitchFamily="34" charset="-120"/>
+              </a:rPr>
+              <a:t>· 多站点结果对比 + 调度建议</a:t>
+            </a:r>
+            <a:endParaRPr lang="en-US" sz="1000" dirty="0"/>
+          </a:p>
+          <a:p>
+            <a:pPr marL="0" indent="0">
+              <a:buNone/>
+            </a:pPr>
+            <a:r>
+              <a:rPr lang="en-US" sz="1000" dirty="0">
+                <a:solidFill>
+                  <a:srgbClr val="1E293B"/>
+                </a:solidFill>
+                <a:latin typeface="Calibri" panose="020F0502020204030204" pitchFamily="34" charset="0"/>
+                <a:ea typeface="Calibri" panose="020F0502020204030204" pitchFamily="34" charset="-122"/>
+                <a:cs typeface="Calibri" panose="020F0502020204030204" pitchFamily="34" charset="-120"/>
+              </a:rPr>
+              <a:t>· 含真实功率时可自动计算精度指标</a:t>
+            </a:r>
+            <a:endParaRPr lang="en-US" sz="1000" dirty="0"/>
+          </a:p>
+          <a:p>
+            <a:pPr marL="0" indent="0">
+              <a:buNone/>
+            </a:pPr>
+            <a:r>
+              <a:rPr lang="en-US" sz="1000" dirty="0">
+                <a:solidFill>
+                  <a:srgbClr val="1E293B"/>
+                </a:solidFill>
+                <a:latin typeface="Calibri" panose="020F0502020204030204" pitchFamily="34" charset="0"/>
+                <a:ea typeface="Calibri" panose="020F0502020204030204" pitchFamily="34" charset="-122"/>
+                <a:cs typeface="Calibri" panose="020F0502020204030204" pitchFamily="34" charset="-120"/>
+              </a:rPr>
+              <a:t>· 结果 CSV 下载 / 历史上传管理</a:t>
+            </a:r>
+            <a:endParaRPr lang="en-US" sz="1000" dirty="0"/>
+          </a:p>
+        </p:txBody>
+      </p:sp>
+      <p:pic>
+        <p:nvPicPr>
+          <p:cNvPr id="24" name="图片 23"/>
+          <p:cNvPicPr>
+            <a:picLocks noChangeAspect="1"/>
+          </p:cNvPicPr>
+          <p:nvPr/>
+        </p:nvPicPr>
+        <p:blipFill>
+          <a:blip r:embed="rId20"/>
+          <a:stretch>
+            <a:fillRect/>
+          </a:stretch>
+        </p:blipFill>
+        <p:spPr>
+          <a:xfrm>
+            <a:off x="200660" y="1005840"/>
+            <a:ext cx="4445000" cy="2456815"/>
+          </a:xfrm>
+          <a:prstGeom prst="rect">
+            <a:avLst/>
+          </a:prstGeom>
+        </p:spPr>
+      </p:pic>
+      <p:pic>
+        <p:nvPicPr>
+          <p:cNvPr id="25" name="图片 24"/>
+          <p:cNvPicPr>
+            <a:picLocks noChangeAspect="1"/>
+          </p:cNvPicPr>
+          <p:nvPr/>
+        </p:nvPicPr>
+        <p:blipFill>
+          <a:blip r:embed="rId21"/>
+          <a:stretch>
+            <a:fillRect/>
+          </a:stretch>
+        </p:blipFill>
+        <p:spPr>
+          <a:xfrm>
+            <a:off x="4809490" y="1005840"/>
+            <a:ext cx="4191635" cy="2456815"/>
+          </a:xfrm>
+          <a:prstGeom prst="rect">
+            <a:avLst/>
+          </a:prstGeom>
+        </p:spPr>
+      </p:pic>
+    </p:spTree>
+  </p:cSld>
+  <p:clrMapOvr>
+    <a:masterClrMapping/>
+  </p:clrMapOvr>
+</p:sld>
+</file>
+
+<file path=ppt/slides/slide17.xml><?xml version="1.0" encoding="utf-8"?>
+<p:sld xmlns:a="http://schemas.openxmlformats.org/drawingml/2006/main" xmlns:r="http://schemas.openxmlformats.org/officeDocument/2006/relationships" xmlns:p="http://schemas.openxmlformats.org/presentationml/2006/main">
+  <p:cSld>
+    <p:bg>
+      <p:bgPr>
+        <a:solidFill>
+          <a:srgbClr val="F8FAFC"/>
+        </a:solidFill>
+        <a:effectLst/>
+      </p:bgPr>
+    </p:bg>
+    <p:spTree>
+      <p:nvGrpSpPr>
+        <p:cNvPr id="1" name=""/>
+        <p:cNvGrpSpPr/>
+        <p:nvPr/>
+      </p:nvGrpSpPr>
+      <p:grpSpPr>
+        <a:xfrm>
+          <a:off x="0" y="0"/>
+          <a:ext cx="0" cy="0"/>
+          <a:chOff x="0" y="0"/>
+          <a:chExt cx="0" cy="0"/>
+        </a:xfrm>
+      </p:grpSpPr>
+      <p:sp>
+        <p:nvSpPr>
+          <p:cNvPr id="2" name="Text 0"/>
+          <p:cNvSpPr/>
+          <p:nvPr/>
+        </p:nvSpPr>
+        <p:spPr>
+          <a:xfrm>
+            <a:off x="548640" y="274320"/>
+            <a:ext cx="7772400" cy="594360"/>
+          </a:xfrm>
+          <a:prstGeom prst="rect">
+            <a:avLst/>
+          </a:prstGeom>
+          <a:noFill/>
+        </p:spPr>
+        <p:txBody>
+          <a:bodyPr wrap="square" lIns="0" tIns="0" rIns="0" bIns="0" rtlCol="0" anchor="ctr"/>
+          <a:lstStyle/>
+          <a:p>
+            <a:pPr marL="0" indent="0">
+              <a:buNone/>
+            </a:pPr>
+            <a:r>
               <a:rPr lang="en-US" sz="3000" b="1" dirty="0">
                 <a:solidFill>
                   <a:srgbClr val="1E293B"/>
@@ -8406,7 +8790,7 @@
                 <a:ea typeface="Calibri" panose="020F0502020204030204" pitchFamily="34" charset="-122"/>
                 <a:cs typeface="Calibri" panose="020F0502020204030204" pitchFamily="34" charset="-120"/>
               </a:rPr>
-              <a:t>4种调度策略同台对比赛</a:t>
+              <a:t>7种调度策略同台对比赛</a:t>
             </a:r>
             <a:endParaRPr lang="en-US" sz="1400" dirty="0"/>
           </a:p>
@@ -8838,7 +9222,7 @@
 </p:sld>
 </file>
 
-<file path=ppt/slides/slide17.xml><?xml version="1.0" encoding="utf-8"?>
+<file path=ppt/slides/slide18.xml><?xml version="1.0" encoding="utf-8"?>
 <p:sld xmlns:a="http://schemas.openxmlformats.org/drawingml/2006/main" xmlns:r="http://schemas.openxmlformats.org/officeDocument/2006/relationships" xmlns:p="http://schemas.openxmlformats.org/presentationml/2006/main">
   <p:cSld>
     <p:bg>
@@ -8926,7 +9310,11 @@
         <p:nvSpPr>
           <p:cNvPr id="4" name="Shape 2"/>
           <p:cNvSpPr/>
-          <p:nvPr/>
+          <p:nvPr>
+            <p:custDataLst>
+              <p:tags r:id="rId1"/>
+            </p:custDataLst>
+          </p:nvPr>
         </p:nvSpPr>
         <p:spPr>
           <a:xfrm>
@@ -8952,7 +9340,11 @@
         <p:nvSpPr>
           <p:cNvPr id="5" name="Shape 3"/>
           <p:cNvSpPr/>
-          <p:nvPr/>
+          <p:nvPr>
+            <p:custDataLst>
+              <p:tags r:id="rId2"/>
+            </p:custDataLst>
+          </p:nvPr>
         </p:nvSpPr>
         <p:spPr>
           <a:xfrm>
@@ -8971,7 +9363,11 @@
         <p:nvSpPr>
           <p:cNvPr id="6" name="Shape 4"/>
           <p:cNvSpPr/>
-          <p:nvPr/>
+          <p:nvPr>
+            <p:custDataLst>
+              <p:tags r:id="rId3"/>
+            </p:custDataLst>
+          </p:nvPr>
         </p:nvSpPr>
         <p:spPr>
           <a:xfrm>
@@ -8992,10 +9388,14 @@
           <p:cNvPicPr>
             <a:picLocks noChangeAspect="1"/>
           </p:cNvPicPr>
-          <p:nvPr/>
+          <p:nvPr>
+            <p:custDataLst>
+              <p:tags r:id="rId4"/>
+            </p:custDataLst>
+          </p:nvPr>
         </p:nvPicPr>
         <p:blipFill>
-          <a:blip r:embed="rId1"/>
+          <a:blip r:embed="rId5"/>
           <a:stretch>
             <a:fillRect/>
           </a:stretch>
@@ -9014,7 +9414,11 @@
         <p:nvSpPr>
           <p:cNvPr id="8" name="Text 5"/>
           <p:cNvSpPr/>
-          <p:nvPr/>
+          <p:nvPr>
+            <p:custDataLst>
+              <p:tags r:id="rId6"/>
+            </p:custDataLst>
+          </p:nvPr>
         </p:nvSpPr>
         <p:spPr>
           <a:xfrm>
@@ -9052,7 +9456,11 @@
         <p:nvSpPr>
           <p:cNvPr id="9" name="Text 6"/>
           <p:cNvSpPr/>
-          <p:nvPr/>
+          <p:nvPr>
+            <p:custDataLst>
+              <p:tags r:id="rId7"/>
+            </p:custDataLst>
+          </p:nvPr>
         </p:nvSpPr>
         <p:spPr>
           <a:xfrm>
@@ -9090,7 +9498,11 @@
         <p:nvSpPr>
           <p:cNvPr id="10" name="Shape 7"/>
           <p:cNvSpPr/>
-          <p:nvPr/>
+          <p:nvPr>
+            <p:custDataLst>
+              <p:tags r:id="rId8"/>
+            </p:custDataLst>
+          </p:nvPr>
         </p:nvSpPr>
         <p:spPr>
           <a:xfrm>
@@ -9116,7 +9528,11 @@
         <p:nvSpPr>
           <p:cNvPr id="11" name="Shape 8"/>
           <p:cNvSpPr/>
-          <p:nvPr/>
+          <p:nvPr>
+            <p:custDataLst>
+              <p:tags r:id="rId9"/>
+            </p:custDataLst>
+          </p:nvPr>
         </p:nvSpPr>
         <p:spPr>
           <a:xfrm>
@@ -9135,7 +9551,11 @@
         <p:nvSpPr>
           <p:cNvPr id="12" name="Shape 9"/>
           <p:cNvSpPr/>
-          <p:nvPr/>
+          <p:nvPr>
+            <p:custDataLst>
+              <p:tags r:id="rId10"/>
+            </p:custDataLst>
+          </p:nvPr>
         </p:nvSpPr>
         <p:spPr>
           <a:xfrm>
@@ -9156,10 +9576,14 @@
           <p:cNvPicPr>
             <a:picLocks noChangeAspect="1"/>
           </p:cNvPicPr>
-          <p:nvPr/>
+          <p:nvPr>
+            <p:custDataLst>
+              <p:tags r:id="rId11"/>
+            </p:custDataLst>
+          </p:nvPr>
         </p:nvPicPr>
         <p:blipFill>
-          <a:blip r:embed="rId2"/>
+          <a:blip r:embed="rId12"/>
           <a:stretch>
             <a:fillRect/>
           </a:stretch>
@@ -9178,7 +9602,11 @@
         <p:nvSpPr>
           <p:cNvPr id="14" name="Text 10"/>
           <p:cNvSpPr/>
-          <p:nvPr/>
+          <p:nvPr>
+            <p:custDataLst>
+              <p:tags r:id="rId13"/>
+            </p:custDataLst>
+          </p:nvPr>
         </p:nvSpPr>
         <p:spPr>
           <a:xfrm>
@@ -9216,7 +9644,11 @@
         <p:nvSpPr>
           <p:cNvPr id="15" name="Text 11"/>
           <p:cNvSpPr/>
-          <p:nvPr/>
+          <p:nvPr>
+            <p:custDataLst>
+              <p:tags r:id="rId14"/>
+            </p:custDataLst>
+          </p:nvPr>
         </p:nvSpPr>
         <p:spPr>
           <a:xfrm>
@@ -9254,7 +9686,11 @@
         <p:nvSpPr>
           <p:cNvPr id="16" name="Shape 12"/>
           <p:cNvSpPr/>
-          <p:nvPr/>
+          <p:nvPr>
+            <p:custDataLst>
+              <p:tags r:id="rId15"/>
+            </p:custDataLst>
+          </p:nvPr>
         </p:nvSpPr>
         <p:spPr>
           <a:xfrm>
@@ -9280,7 +9716,11 @@
         <p:nvSpPr>
           <p:cNvPr id="17" name="Shape 13"/>
           <p:cNvSpPr/>
-          <p:nvPr/>
+          <p:nvPr>
+            <p:custDataLst>
+              <p:tags r:id="rId16"/>
+            </p:custDataLst>
+          </p:nvPr>
         </p:nvSpPr>
         <p:spPr>
           <a:xfrm>
@@ -9299,7 +9739,11 @@
         <p:nvSpPr>
           <p:cNvPr id="18" name="Shape 14"/>
           <p:cNvSpPr/>
-          <p:nvPr/>
+          <p:nvPr>
+            <p:custDataLst>
+              <p:tags r:id="rId17"/>
+            </p:custDataLst>
+          </p:nvPr>
         </p:nvSpPr>
         <p:spPr>
           <a:xfrm>
@@ -9320,10 +9764,14 @@
           <p:cNvPicPr>
             <a:picLocks noChangeAspect="1"/>
           </p:cNvPicPr>
-          <p:nvPr/>
+          <p:nvPr>
+            <p:custDataLst>
+              <p:tags r:id="rId18"/>
+            </p:custDataLst>
+          </p:nvPr>
         </p:nvPicPr>
         <p:blipFill>
-          <a:blip r:embed="rId3"/>
+          <a:blip r:embed="rId19"/>
           <a:stretch>
             <a:fillRect/>
           </a:stretch>
@@ -9342,7 +9790,11 @@
         <p:nvSpPr>
           <p:cNvPr id="20" name="Text 15"/>
           <p:cNvSpPr/>
-          <p:nvPr/>
+          <p:nvPr>
+            <p:custDataLst>
+              <p:tags r:id="rId20"/>
+            </p:custDataLst>
+          </p:nvPr>
         </p:nvSpPr>
         <p:spPr>
           <a:xfrm>
@@ -9380,7 +9832,11 @@
         <p:nvSpPr>
           <p:cNvPr id="21" name="Text 16"/>
           <p:cNvSpPr/>
-          <p:nvPr/>
+          <p:nvPr>
+            <p:custDataLst>
+              <p:tags r:id="rId21"/>
+            </p:custDataLst>
+          </p:nvPr>
         </p:nvSpPr>
         <p:spPr>
           <a:xfrm>
@@ -9418,7 +9874,11 @@
         <p:nvSpPr>
           <p:cNvPr id="22" name="Shape 17"/>
           <p:cNvSpPr/>
-          <p:nvPr/>
+          <p:nvPr>
+            <p:custDataLst>
+              <p:tags r:id="rId22"/>
+            </p:custDataLst>
+          </p:nvPr>
         </p:nvSpPr>
         <p:spPr>
           <a:xfrm>
@@ -9444,7 +9904,11 @@
         <p:nvSpPr>
           <p:cNvPr id="23" name="Shape 18"/>
           <p:cNvSpPr/>
-          <p:nvPr/>
+          <p:nvPr>
+            <p:custDataLst>
+              <p:tags r:id="rId23"/>
+            </p:custDataLst>
+          </p:nvPr>
         </p:nvSpPr>
         <p:spPr>
           <a:xfrm>
@@ -9463,7 +9927,11 @@
         <p:nvSpPr>
           <p:cNvPr id="24" name="Shape 19"/>
           <p:cNvSpPr/>
-          <p:nvPr/>
+          <p:nvPr>
+            <p:custDataLst>
+              <p:tags r:id="rId24"/>
+            </p:custDataLst>
+          </p:nvPr>
         </p:nvSpPr>
         <p:spPr>
           <a:xfrm>
@@ -9484,10 +9952,14 @@
           <p:cNvPicPr>
             <a:picLocks noChangeAspect="1"/>
           </p:cNvPicPr>
-          <p:nvPr/>
+          <p:nvPr>
+            <p:custDataLst>
+              <p:tags r:id="rId25"/>
+            </p:custDataLst>
+          </p:nvPr>
         </p:nvPicPr>
         <p:blipFill>
-          <a:blip r:embed="rId4"/>
+          <a:blip r:embed="rId26"/>
           <a:stretch>
             <a:fillRect/>
           </a:stretch>
@@ -9506,7 +9978,11 @@
         <p:nvSpPr>
           <p:cNvPr id="26" name="Text 20"/>
           <p:cNvSpPr/>
-          <p:nvPr/>
+          <p:nvPr>
+            <p:custDataLst>
+              <p:tags r:id="rId27"/>
+            </p:custDataLst>
+          </p:nvPr>
         </p:nvSpPr>
         <p:spPr>
           <a:xfrm>
@@ -9544,7 +10020,11 @@
         <p:nvSpPr>
           <p:cNvPr id="27" name="Text 21"/>
           <p:cNvSpPr/>
-          <p:nvPr/>
+          <p:nvPr>
+            <p:custDataLst>
+              <p:tags r:id="rId28"/>
+            </p:custDataLst>
+          </p:nvPr>
         </p:nvSpPr>
         <p:spPr>
           <a:xfrm>
@@ -11642,6 +12122,17 @@
               <a:buNone/>
             </a:pPr>
             <a:r>
+              <a:rPr lang="zh-CN" altLang="en-US" sz="1300" b="1" dirty="0">
+                <a:solidFill>
+                  <a:srgbClr val="1E293B"/>
+                </a:solidFill>
+                <a:latin typeface="Calibri" panose="020F0502020204030204" pitchFamily="34" charset="0"/>
+                <a:ea typeface="Calibri" panose="020F0502020204030204" pitchFamily="34" charset="-122"/>
+                <a:cs typeface="Calibri" panose="020F0502020204030204" pitchFamily="34" charset="-120"/>
+              </a:rPr>
+              <a:t>数字中国创新大赛</a:t>
+            </a:r>
+            <a:r>
               <a:rPr lang="en-US" sz="1300" b="1" dirty="0">
                 <a:solidFill>
                   <a:srgbClr val="1E293B"/>
@@ -11650,7 +12141,7 @@
                 <a:ea typeface="Calibri" panose="020F0502020204030204" pitchFamily="34" charset="-122"/>
                 <a:cs typeface="Calibri" panose="020F0502020204030204" pitchFamily="34" charset="-120"/>
               </a:rPr>
-              <a:t>竞赛A榜数据集</a:t>
+              <a:t>数据集</a:t>
             </a:r>
             <a:endParaRPr lang="en-US" sz="1300" dirty="0"/>
           </a:p>
@@ -18547,7 +19038,11 @@
         <p:nvSpPr>
           <p:cNvPr id="3" name="Shape 1"/>
           <p:cNvSpPr/>
-          <p:nvPr/>
+          <p:nvPr>
+            <p:custDataLst>
+              <p:tags r:id="rId1"/>
+            </p:custDataLst>
+          </p:nvPr>
         </p:nvSpPr>
         <p:spPr>
           <a:xfrm>
@@ -18573,7 +19068,11 @@
         <p:nvSpPr>
           <p:cNvPr id="4" name="Shape 2"/>
           <p:cNvSpPr/>
-          <p:nvPr/>
+          <p:nvPr>
+            <p:custDataLst>
+              <p:tags r:id="rId2"/>
+            </p:custDataLst>
+          </p:nvPr>
         </p:nvSpPr>
         <p:spPr>
           <a:xfrm>
@@ -18592,7 +19091,11 @@
         <p:nvSpPr>
           <p:cNvPr id="5" name="Shape 3"/>
           <p:cNvSpPr/>
-          <p:nvPr/>
+          <p:nvPr>
+            <p:custDataLst>
+              <p:tags r:id="rId3"/>
+            </p:custDataLst>
+          </p:nvPr>
         </p:nvSpPr>
         <p:spPr>
           <a:xfrm>
@@ -18611,7 +19114,11 @@
         <p:nvSpPr>
           <p:cNvPr id="6" name="Text 4"/>
           <p:cNvSpPr/>
-          <p:nvPr/>
+          <p:nvPr>
+            <p:custDataLst>
+              <p:tags r:id="rId4"/>
+            </p:custDataLst>
+          </p:nvPr>
         </p:nvSpPr>
         <p:spPr>
           <a:xfrm>
@@ -18649,7 +19156,11 @@
         <p:nvSpPr>
           <p:cNvPr id="7" name="Text 5"/>
           <p:cNvSpPr/>
-          <p:nvPr/>
+          <p:nvPr>
+            <p:custDataLst>
+              <p:tags r:id="rId5"/>
+            </p:custDataLst>
+          </p:nvPr>
         </p:nvSpPr>
         <p:spPr>
           <a:xfrm>
@@ -18687,7 +19198,11 @@
         <p:nvSpPr>
           <p:cNvPr id="8" name="Text 6"/>
           <p:cNvSpPr/>
-          <p:nvPr/>
+          <p:nvPr>
+            <p:custDataLst>
+              <p:tags r:id="rId6"/>
+            </p:custDataLst>
+          </p:nvPr>
         </p:nvSpPr>
         <p:spPr>
           <a:xfrm>
@@ -18725,7 +19240,11 @@
         <p:nvSpPr>
           <p:cNvPr id="9" name="Text 7"/>
           <p:cNvSpPr/>
-          <p:nvPr/>
+          <p:nvPr>
+            <p:custDataLst>
+              <p:tags r:id="rId7"/>
+            </p:custDataLst>
+          </p:nvPr>
         </p:nvSpPr>
         <p:spPr>
           <a:xfrm>
@@ -18763,7 +19282,11 @@
         <p:nvSpPr>
           <p:cNvPr id="10" name="Shape 8"/>
           <p:cNvSpPr/>
-          <p:nvPr/>
+          <p:nvPr>
+            <p:custDataLst>
+              <p:tags r:id="rId8"/>
+            </p:custDataLst>
+          </p:nvPr>
         </p:nvSpPr>
         <p:spPr>
           <a:xfrm>
@@ -18789,7 +19312,11 @@
         <p:nvSpPr>
           <p:cNvPr id="11" name="Shape 9"/>
           <p:cNvSpPr/>
-          <p:nvPr/>
+          <p:nvPr>
+            <p:custDataLst>
+              <p:tags r:id="rId9"/>
+            </p:custDataLst>
+          </p:nvPr>
         </p:nvSpPr>
         <p:spPr>
           <a:xfrm>
@@ -18808,7 +19335,11 @@
         <p:nvSpPr>
           <p:cNvPr id="12" name="Shape 10"/>
           <p:cNvSpPr/>
-          <p:nvPr/>
+          <p:nvPr>
+            <p:custDataLst>
+              <p:tags r:id="rId10"/>
+            </p:custDataLst>
+          </p:nvPr>
         </p:nvSpPr>
         <p:spPr>
           <a:xfrm>
@@ -18827,7 +19358,11 @@
         <p:nvSpPr>
           <p:cNvPr id="13" name="Text 11"/>
           <p:cNvSpPr/>
-          <p:nvPr/>
+          <p:nvPr>
+            <p:custDataLst>
+              <p:tags r:id="rId11"/>
+            </p:custDataLst>
+          </p:nvPr>
         </p:nvSpPr>
         <p:spPr>
           <a:xfrm>
@@ -18865,7 +19400,11 @@
         <p:nvSpPr>
           <p:cNvPr id="14" name="Text 12"/>
           <p:cNvSpPr/>
-          <p:nvPr/>
+          <p:nvPr>
+            <p:custDataLst>
+              <p:tags r:id="rId12"/>
+            </p:custDataLst>
+          </p:nvPr>
         </p:nvSpPr>
         <p:spPr>
           <a:xfrm>
@@ -18903,7 +19442,11 @@
         <p:nvSpPr>
           <p:cNvPr id="15" name="Text 13"/>
           <p:cNvSpPr/>
-          <p:nvPr/>
+          <p:nvPr>
+            <p:custDataLst>
+              <p:tags r:id="rId13"/>
+            </p:custDataLst>
+          </p:nvPr>
         </p:nvSpPr>
         <p:spPr>
           <a:xfrm>
@@ -18941,7 +19484,11 @@
         <p:nvSpPr>
           <p:cNvPr id="16" name="Text 14"/>
           <p:cNvSpPr/>
-          <p:nvPr/>
+          <p:nvPr>
+            <p:custDataLst>
+              <p:tags r:id="rId14"/>
+            </p:custDataLst>
+          </p:nvPr>
         </p:nvSpPr>
         <p:spPr>
           <a:xfrm>
@@ -18979,7 +19526,11 @@
         <p:nvSpPr>
           <p:cNvPr id="17" name="Shape 15"/>
           <p:cNvSpPr/>
-          <p:nvPr/>
+          <p:nvPr>
+            <p:custDataLst>
+              <p:tags r:id="rId15"/>
+            </p:custDataLst>
+          </p:nvPr>
         </p:nvSpPr>
         <p:spPr>
           <a:xfrm>
@@ -19005,7 +19556,11 @@
         <p:nvSpPr>
           <p:cNvPr id="18" name="Shape 16"/>
           <p:cNvSpPr/>
-          <p:nvPr/>
+          <p:nvPr>
+            <p:custDataLst>
+              <p:tags r:id="rId16"/>
+            </p:custDataLst>
+          </p:nvPr>
         </p:nvSpPr>
         <p:spPr>
           <a:xfrm>
@@ -19024,7 +19579,11 @@
         <p:nvSpPr>
           <p:cNvPr id="19" name="Shape 17"/>
           <p:cNvSpPr/>
-          <p:nvPr/>
+          <p:nvPr>
+            <p:custDataLst>
+              <p:tags r:id="rId17"/>
+            </p:custDataLst>
+          </p:nvPr>
         </p:nvSpPr>
         <p:spPr>
           <a:xfrm>
@@ -19043,7 +19602,11 @@
         <p:nvSpPr>
           <p:cNvPr id="20" name="Text 18"/>
           <p:cNvSpPr/>
-          <p:nvPr/>
+          <p:nvPr>
+            <p:custDataLst>
+              <p:tags r:id="rId18"/>
+            </p:custDataLst>
+          </p:nvPr>
         </p:nvSpPr>
         <p:spPr>
           <a:xfrm>
@@ -19081,7 +19644,11 @@
         <p:nvSpPr>
           <p:cNvPr id="21" name="Text 19"/>
           <p:cNvSpPr/>
-          <p:nvPr/>
+          <p:nvPr>
+            <p:custDataLst>
+              <p:tags r:id="rId19"/>
+            </p:custDataLst>
+          </p:nvPr>
         </p:nvSpPr>
         <p:spPr>
           <a:xfrm>
@@ -19119,7 +19686,11 @@
         <p:nvSpPr>
           <p:cNvPr id="22" name="Text 20"/>
           <p:cNvSpPr/>
-          <p:nvPr/>
+          <p:nvPr>
+            <p:custDataLst>
+              <p:tags r:id="rId20"/>
+            </p:custDataLst>
+          </p:nvPr>
         </p:nvSpPr>
         <p:spPr>
           <a:xfrm>
@@ -19157,7 +19728,11 @@
         <p:nvSpPr>
           <p:cNvPr id="23" name="Text 21"/>
           <p:cNvSpPr/>
-          <p:nvPr/>
+          <p:nvPr>
+            <p:custDataLst>
+              <p:tags r:id="rId21"/>
+            </p:custDataLst>
+          </p:nvPr>
         </p:nvSpPr>
         <p:spPr>
           <a:xfrm>
@@ -19195,7 +19770,11 @@
         <p:nvSpPr>
           <p:cNvPr id="24" name="Shape 22"/>
           <p:cNvSpPr/>
-          <p:nvPr/>
+          <p:nvPr>
+            <p:custDataLst>
+              <p:tags r:id="rId22"/>
+            </p:custDataLst>
+          </p:nvPr>
         </p:nvSpPr>
         <p:spPr>
           <a:xfrm>
@@ -19221,7 +19800,11 @@
         <p:nvSpPr>
           <p:cNvPr id="25" name="Shape 23"/>
           <p:cNvSpPr/>
-          <p:nvPr/>
+          <p:nvPr>
+            <p:custDataLst>
+              <p:tags r:id="rId23"/>
+            </p:custDataLst>
+          </p:nvPr>
         </p:nvSpPr>
         <p:spPr>
           <a:xfrm>
@@ -19240,7 +19823,11 @@
         <p:nvSpPr>
           <p:cNvPr id="26" name="Shape 24"/>
           <p:cNvSpPr/>
-          <p:nvPr/>
+          <p:nvPr>
+            <p:custDataLst>
+              <p:tags r:id="rId24"/>
+            </p:custDataLst>
+          </p:nvPr>
         </p:nvSpPr>
         <p:spPr>
           <a:xfrm>
@@ -19259,7 +19846,11 @@
         <p:nvSpPr>
           <p:cNvPr id="27" name="Text 25"/>
           <p:cNvSpPr/>
-          <p:nvPr/>
+          <p:nvPr>
+            <p:custDataLst>
+              <p:tags r:id="rId25"/>
+            </p:custDataLst>
+          </p:nvPr>
         </p:nvSpPr>
         <p:spPr>
           <a:xfrm>
@@ -19297,7 +19888,11 @@
         <p:nvSpPr>
           <p:cNvPr id="28" name="Text 26"/>
           <p:cNvSpPr/>
-          <p:nvPr/>
+          <p:nvPr>
+            <p:custDataLst>
+              <p:tags r:id="rId26"/>
+            </p:custDataLst>
+          </p:nvPr>
         </p:nvSpPr>
         <p:spPr>
           <a:xfrm>
@@ -19335,7 +19930,11 @@
         <p:nvSpPr>
           <p:cNvPr id="29" name="Text 27"/>
           <p:cNvSpPr/>
-          <p:nvPr/>
+          <p:nvPr>
+            <p:custDataLst>
+              <p:tags r:id="rId27"/>
+            </p:custDataLst>
+          </p:nvPr>
         </p:nvSpPr>
         <p:spPr>
           <a:xfrm>
@@ -19373,7 +19972,11 @@
         <p:nvSpPr>
           <p:cNvPr id="30" name="Text 28"/>
           <p:cNvSpPr/>
-          <p:nvPr/>
+          <p:nvPr>
+            <p:custDataLst>
+              <p:tags r:id="rId28"/>
+            </p:custDataLst>
+          </p:nvPr>
         </p:nvSpPr>
         <p:spPr>
           <a:xfrm>
@@ -19461,7 +20064,7 @@
           <p:nvPr/>
         </p:nvPicPr>
         <p:blipFill>
-          <a:blip r:embed="rId1"/>
+          <a:blip r:embed="rId29"/>
           <a:stretch>
             <a:fillRect/>
           </a:stretch>
@@ -19855,9 +20458,129 @@
 </p:tagLst>
 </file>
 
+<file path=ppt/tags/tag100.xml><?xml version="1.0" encoding="utf-8"?>
+<p:tagLst xmlns:p="http://schemas.openxmlformats.org/presentationml/2006/main">
+  <p:tag name="KSO_WM_DIAGRAM_VIRTUALLY_FRAME" val="{&quot;height&quot;:291.6,&quot;left&quot;:36,&quot;top&quot;:82.8,&quot;width&quot;:669.6}"/>
+</p:tagLst>
+</file>
+
+<file path=ppt/tags/tag101.xml><?xml version="1.0" encoding="utf-8"?>
+<p:tagLst xmlns:p="http://schemas.openxmlformats.org/presentationml/2006/main">
+  <p:tag name="KSO_WM_DIAGRAM_VIRTUALLY_FRAME" val="{&quot;height&quot;:291.6,&quot;left&quot;:36,&quot;top&quot;:82.8,&quot;width&quot;:669.6}"/>
+</p:tagLst>
+</file>
+
+<file path=ppt/tags/tag102.xml><?xml version="1.0" encoding="utf-8"?>
+<p:tagLst xmlns:p="http://schemas.openxmlformats.org/presentationml/2006/main">
+  <p:tag name="KSO_WM_DIAGRAM_VIRTUALLY_FRAME" val="{&quot;height&quot;:291.6,&quot;left&quot;:36,&quot;top&quot;:82.8,&quot;width&quot;:669.6}"/>
+</p:tagLst>
+</file>
+
+<file path=ppt/tags/tag103.xml><?xml version="1.0" encoding="utf-8"?>
+<p:tagLst xmlns:p="http://schemas.openxmlformats.org/presentationml/2006/main">
+  <p:tag name="KSO_WM_DIAGRAM_VIRTUALLY_FRAME" val="{&quot;height&quot;:291.6,&quot;left&quot;:36,&quot;top&quot;:82.8,&quot;width&quot;:669.6}"/>
+</p:tagLst>
+</file>
+
+<file path=ppt/tags/tag104.xml><?xml version="1.0" encoding="utf-8"?>
+<p:tagLst xmlns:p="http://schemas.openxmlformats.org/presentationml/2006/main">
+  <p:tag name="KSO_WM_DIAGRAM_VIRTUALLY_FRAME" val="{&quot;height&quot;:291.6,&quot;left&quot;:36,&quot;top&quot;:82.8,&quot;width&quot;:669.6}"/>
+</p:tagLst>
+</file>
+
+<file path=ppt/tags/tag105.xml><?xml version="1.0" encoding="utf-8"?>
+<p:tagLst xmlns:p="http://schemas.openxmlformats.org/presentationml/2006/main">
+  <p:tag name="KSO_WM_DIAGRAM_VIRTUALLY_FRAME" val="{&quot;height&quot;:291.6,&quot;left&quot;:36,&quot;top&quot;:82.8,&quot;width&quot;:669.6}"/>
+</p:tagLst>
+</file>
+
+<file path=ppt/tags/tag106.xml><?xml version="1.0" encoding="utf-8"?>
+<p:tagLst xmlns:p="http://schemas.openxmlformats.org/presentationml/2006/main">
+  <p:tag name="KSO_WM_DIAGRAM_VIRTUALLY_FRAME" val="{&quot;height&quot;:291.6,&quot;left&quot;:36,&quot;top&quot;:82.8,&quot;width&quot;:669.6}"/>
+</p:tagLst>
+</file>
+
+<file path=ppt/tags/tag107.xml><?xml version="1.0" encoding="utf-8"?>
+<p:tagLst xmlns:p="http://schemas.openxmlformats.org/presentationml/2006/main">
+  <p:tag name="KSO_WM_DIAGRAM_VIRTUALLY_FRAME" val="{&quot;height&quot;:291.6,&quot;left&quot;:36,&quot;top&quot;:82.8,&quot;width&quot;:669.6}"/>
+</p:tagLst>
+</file>
+
+<file path=ppt/tags/tag108.xml><?xml version="1.0" encoding="utf-8"?>
+<p:tagLst xmlns:p="http://schemas.openxmlformats.org/presentationml/2006/main">
+  <p:tag name="KSO_WM_DIAGRAM_VIRTUALLY_FRAME" val="{&quot;height&quot;:291.6,&quot;left&quot;:36,&quot;top&quot;:82.8,&quot;width&quot;:669.6}"/>
+</p:tagLst>
+</file>
+
+<file path=ppt/tags/tag109.xml><?xml version="1.0" encoding="utf-8"?>
+<p:tagLst xmlns:p="http://schemas.openxmlformats.org/presentationml/2006/main">
+  <p:tag name="KSO_WM_DIAGRAM_VIRTUALLY_FRAME" val="{&quot;height&quot;:291.6,&quot;left&quot;:36,&quot;top&quot;:82.8,&quot;width&quot;:669.6}"/>
+</p:tagLst>
+</file>
+
 <file path=ppt/tags/tag11.xml><?xml version="1.0" encoding="utf-8"?>
 <p:tagLst xmlns:p="http://schemas.openxmlformats.org/presentationml/2006/main">
   <p:tag name="KSO_WM_DIAGRAM_VIRTUALLY_FRAME" val="{&quot;height&quot;:277.2,&quot;left&quot;:36,&quot;top&quot;:93.6,&quot;width&quot;:345.6}"/>
+</p:tagLst>
+</file>
+
+<file path=ppt/tags/tag110.xml><?xml version="1.0" encoding="utf-8"?>
+<p:tagLst xmlns:p="http://schemas.openxmlformats.org/presentationml/2006/main">
+  <p:tag name="KSO_WM_DIAGRAM_VIRTUALLY_FRAME" val="{&quot;height&quot;:291.6,&quot;left&quot;:36,&quot;top&quot;:82.8,&quot;width&quot;:669.6}"/>
+</p:tagLst>
+</file>
+
+<file path=ppt/tags/tag111.xml><?xml version="1.0" encoding="utf-8"?>
+<p:tagLst xmlns:p="http://schemas.openxmlformats.org/presentationml/2006/main">
+  <p:tag name="KSO_WM_DIAGRAM_VIRTUALLY_FRAME" val="{&quot;height&quot;:291.6,&quot;left&quot;:36,&quot;top&quot;:82.8,&quot;width&quot;:669.6}"/>
+</p:tagLst>
+</file>
+
+<file path=ppt/tags/tag112.xml><?xml version="1.0" encoding="utf-8"?>
+<p:tagLst xmlns:p="http://schemas.openxmlformats.org/presentationml/2006/main">
+  <p:tag name="KSO_WM_DIAGRAM_VIRTUALLY_FRAME" val="{&quot;height&quot;:291.6,&quot;left&quot;:36,&quot;top&quot;:82.8,&quot;width&quot;:669.6}"/>
+</p:tagLst>
+</file>
+
+<file path=ppt/tags/tag113.xml><?xml version="1.0" encoding="utf-8"?>
+<p:tagLst xmlns:p="http://schemas.openxmlformats.org/presentationml/2006/main">
+  <p:tag name="KSO_WM_DIAGRAM_VIRTUALLY_FRAME" val="{&quot;height&quot;:291.6,&quot;left&quot;:36,&quot;top&quot;:82.8,&quot;width&quot;:669.6}"/>
+</p:tagLst>
+</file>
+
+<file path=ppt/tags/tag114.xml><?xml version="1.0" encoding="utf-8"?>
+<p:tagLst xmlns:p="http://schemas.openxmlformats.org/presentationml/2006/main">
+  <p:tag name="KSO_WM_DIAGRAM_VIRTUALLY_FRAME" val="{&quot;height&quot;:291.6,&quot;left&quot;:36,&quot;top&quot;:82.8,&quot;width&quot;:669.6}"/>
+</p:tagLst>
+</file>
+
+<file path=ppt/tags/tag115.xml><?xml version="1.0" encoding="utf-8"?>
+<p:tagLst xmlns:p="http://schemas.openxmlformats.org/presentationml/2006/main">
+  <p:tag name="KSO_WM_DIAGRAM_VIRTUALLY_FRAME" val="{&quot;height&quot;:291.6,&quot;left&quot;:36,&quot;top&quot;:82.8,&quot;width&quot;:669.6}"/>
+</p:tagLst>
+</file>
+
+<file path=ppt/tags/tag116.xml><?xml version="1.0" encoding="utf-8"?>
+<p:tagLst xmlns:p="http://schemas.openxmlformats.org/presentationml/2006/main">
+  <p:tag name="KSO_WM_DIAGRAM_VIRTUALLY_FRAME" val="{&quot;height&quot;:291.6,&quot;left&quot;:36,&quot;top&quot;:82.8,&quot;width&quot;:669.6}"/>
+</p:tagLst>
+</file>
+
+<file path=ppt/tags/tag117.xml><?xml version="1.0" encoding="utf-8"?>
+<p:tagLst xmlns:p="http://schemas.openxmlformats.org/presentationml/2006/main">
+  <p:tag name="KSO_WM_DIAGRAM_VIRTUALLY_FRAME" val="{&quot;height&quot;:291.6,&quot;left&quot;:36,&quot;top&quot;:82.8,&quot;width&quot;:669.6}"/>
+</p:tagLst>
+</file>
+
+<file path=ppt/tags/tag118.xml><?xml version="1.0" encoding="utf-8"?>
+<p:tagLst xmlns:p="http://schemas.openxmlformats.org/presentationml/2006/main">
+  <p:tag name="KSO_WM_DIAGRAM_VIRTUALLY_FRAME" val="{&quot;height&quot;:291.6,&quot;left&quot;:36,&quot;top&quot;:82.8,&quot;width&quot;:669.6}"/>
+</p:tagLst>
+</file>
+
+<file path=ppt/tags/tag119.xml><?xml version="1.0" encoding="utf-8"?>
+<p:tagLst xmlns:p="http://schemas.openxmlformats.org/presentationml/2006/main">
+  <p:tag name="KSO_WM_DIAGRAM_VIRTUALLY_FRAME" val="{&quot;height&quot;:291.6,&quot;left&quot;:36,&quot;top&quot;:82.8,&quot;width&quot;:669.6}"/>
 </p:tagLst>
 </file>
 
@@ -19867,15 +20590,183 @@
 </p:tagLst>
 </file>
 
+<file path=ppt/tags/tag120.xml><?xml version="1.0" encoding="utf-8"?>
+<p:tagLst xmlns:p="http://schemas.openxmlformats.org/presentationml/2006/main">
+  <p:tag name="KSO_WM_DIAGRAM_VIRTUALLY_FRAME" val="{&quot;height&quot;:291.6,&quot;left&quot;:36,&quot;top&quot;:82.8,&quot;width&quot;:669.6}"/>
+</p:tagLst>
+</file>
+
+<file path=ppt/tags/tag121.xml><?xml version="1.0" encoding="utf-8"?>
+<p:tagLst xmlns:p="http://schemas.openxmlformats.org/presentationml/2006/main">
+  <p:tag name="KSO_WM_DIAGRAM_VIRTUALLY_FRAME" val="{&quot;height&quot;:291.6,&quot;left&quot;:36,&quot;top&quot;:82.8,&quot;width&quot;:669.6}"/>
+</p:tagLst>
+</file>
+
+<file path=ppt/tags/tag122.xml><?xml version="1.0" encoding="utf-8"?>
+<p:tagLst xmlns:p="http://schemas.openxmlformats.org/presentationml/2006/main">
+  <p:tag name="KSO_WM_DIAGRAM_VIRTUALLY_FRAME" val="{&quot;height&quot;:291.6,&quot;left&quot;:36,&quot;top&quot;:82.8,&quot;width&quot;:669.6}"/>
+</p:tagLst>
+</file>
+
+<file path=ppt/tags/tag123.xml><?xml version="1.0" encoding="utf-8"?>
+<p:tagLst xmlns:p="http://schemas.openxmlformats.org/presentationml/2006/main">
+  <p:tag name="KSO_WM_DIAGRAM_VIRTUALLY_FRAME" val="{&quot;height&quot;:291.6,&quot;left&quot;:36,&quot;top&quot;:82.8,&quot;width&quot;:669.6}"/>
+</p:tagLst>
+</file>
+
+<file path=ppt/tags/tag124.xml><?xml version="1.0" encoding="utf-8"?>
+<p:tagLst xmlns:p="http://schemas.openxmlformats.org/presentationml/2006/main">
+  <p:tag name="KSO_WM_DIAGRAM_VIRTUALLY_FRAME" val="{&quot;height&quot;:201.6,&quot;left&quot;:36,&quot;top&quot;:82.8,&quot;width&quot;:669.6}"/>
+</p:tagLst>
+</file>
+
+<file path=ppt/tags/tag125.xml><?xml version="1.0" encoding="utf-8"?>
+<p:tagLst xmlns:p="http://schemas.openxmlformats.org/presentationml/2006/main">
+  <p:tag name="KSO_WM_DIAGRAM_VIRTUALLY_FRAME" val="{&quot;height&quot;:201.6,&quot;left&quot;:36,&quot;top&quot;:82.8,&quot;width&quot;:669.6}"/>
+</p:tagLst>
+</file>
+
+<file path=ppt/tags/tag126.xml><?xml version="1.0" encoding="utf-8"?>
+<p:tagLst xmlns:p="http://schemas.openxmlformats.org/presentationml/2006/main">
+  <p:tag name="KSO_WM_DIAGRAM_VIRTUALLY_FRAME" val="{&quot;height&quot;:201.6,&quot;left&quot;:36,&quot;top&quot;:82.8,&quot;width&quot;:669.6}"/>
+</p:tagLst>
+</file>
+
+<file path=ppt/tags/tag127.xml><?xml version="1.0" encoding="utf-8"?>
+<p:tagLst xmlns:p="http://schemas.openxmlformats.org/presentationml/2006/main">
+  <p:tag name="KSO_WM_DIAGRAM_VIRTUALLY_FRAME" val="{&quot;height&quot;:201.6,&quot;left&quot;:36,&quot;top&quot;:82.8,&quot;width&quot;:669.6}"/>
+</p:tagLst>
+</file>
+
+<file path=ppt/tags/tag128.xml><?xml version="1.0" encoding="utf-8"?>
+<p:tagLst xmlns:p="http://schemas.openxmlformats.org/presentationml/2006/main">
+  <p:tag name="KSO_WM_DIAGRAM_VIRTUALLY_FRAME" val="{&quot;height&quot;:201.6,&quot;left&quot;:36,&quot;top&quot;:82.8,&quot;width&quot;:669.6}"/>
+</p:tagLst>
+</file>
+
+<file path=ppt/tags/tag129.xml><?xml version="1.0" encoding="utf-8"?>
+<p:tagLst xmlns:p="http://schemas.openxmlformats.org/presentationml/2006/main">
+  <p:tag name="KSO_WM_DIAGRAM_VIRTUALLY_FRAME" val="{&quot;height&quot;:201.6,&quot;left&quot;:36,&quot;top&quot;:82.8,&quot;width&quot;:669.6}"/>
+</p:tagLst>
+</file>
+
 <file path=ppt/tags/tag13.xml><?xml version="1.0" encoding="utf-8"?>
 <p:tagLst xmlns:p="http://schemas.openxmlformats.org/presentationml/2006/main">
   <p:tag name="KSO_WM_DIAGRAM_VIRTUALLY_FRAME" val="{&quot;height&quot;:277.2,&quot;left&quot;:36,&quot;top&quot;:93.6,&quot;width&quot;:345.6}"/>
 </p:tagLst>
 </file>
 
+<file path=ppt/tags/tag130.xml><?xml version="1.0" encoding="utf-8"?>
+<p:tagLst xmlns:p="http://schemas.openxmlformats.org/presentationml/2006/main">
+  <p:tag name="KSO_WM_DIAGRAM_VIRTUALLY_FRAME" val="{&quot;height&quot;:201.6,&quot;left&quot;:36,&quot;top&quot;:82.8,&quot;width&quot;:669.6}"/>
+</p:tagLst>
+</file>
+
+<file path=ppt/tags/tag131.xml><?xml version="1.0" encoding="utf-8"?>
+<p:tagLst xmlns:p="http://schemas.openxmlformats.org/presentationml/2006/main">
+  <p:tag name="KSO_WM_DIAGRAM_VIRTUALLY_FRAME" val="{&quot;height&quot;:201.6,&quot;left&quot;:36,&quot;top&quot;:82.8,&quot;width&quot;:669.6}"/>
+</p:tagLst>
+</file>
+
+<file path=ppt/tags/tag132.xml><?xml version="1.0" encoding="utf-8"?>
+<p:tagLst xmlns:p="http://schemas.openxmlformats.org/presentationml/2006/main">
+  <p:tag name="KSO_WM_DIAGRAM_VIRTUALLY_FRAME" val="{&quot;height&quot;:201.6,&quot;left&quot;:36,&quot;top&quot;:82.8,&quot;width&quot;:669.6}"/>
+</p:tagLst>
+</file>
+
+<file path=ppt/tags/tag133.xml><?xml version="1.0" encoding="utf-8"?>
+<p:tagLst xmlns:p="http://schemas.openxmlformats.org/presentationml/2006/main">
+  <p:tag name="KSO_WM_DIAGRAM_VIRTUALLY_FRAME" val="{&quot;height&quot;:201.6,&quot;left&quot;:36,&quot;top&quot;:82.8,&quot;width&quot;:669.6}"/>
+</p:tagLst>
+</file>
+
+<file path=ppt/tags/tag134.xml><?xml version="1.0" encoding="utf-8"?>
+<p:tagLst xmlns:p="http://schemas.openxmlformats.org/presentationml/2006/main">
+  <p:tag name="KSO_WM_DIAGRAM_VIRTUALLY_FRAME" val="{&quot;height&quot;:201.6,&quot;left&quot;:36,&quot;top&quot;:82.8,&quot;width&quot;:669.6}"/>
+</p:tagLst>
+</file>
+
+<file path=ppt/tags/tag135.xml><?xml version="1.0" encoding="utf-8"?>
+<p:tagLst xmlns:p="http://schemas.openxmlformats.org/presentationml/2006/main">
+  <p:tag name="KSO_WM_DIAGRAM_VIRTUALLY_FRAME" val="{&quot;height&quot;:201.6,&quot;left&quot;:36,&quot;top&quot;:82.8,&quot;width&quot;:669.6}"/>
+</p:tagLst>
+</file>
+
+<file path=ppt/tags/tag136.xml><?xml version="1.0" encoding="utf-8"?>
+<p:tagLst xmlns:p="http://schemas.openxmlformats.org/presentationml/2006/main">
+  <p:tag name="KSO_WM_DIAGRAM_VIRTUALLY_FRAME" val="{&quot;height&quot;:201.6,&quot;left&quot;:36,&quot;top&quot;:82.8,&quot;width&quot;:669.6}"/>
+</p:tagLst>
+</file>
+
+<file path=ppt/tags/tag137.xml><?xml version="1.0" encoding="utf-8"?>
+<p:tagLst xmlns:p="http://schemas.openxmlformats.org/presentationml/2006/main">
+  <p:tag name="KSO_WM_DIAGRAM_VIRTUALLY_FRAME" val="{&quot;height&quot;:201.6,&quot;left&quot;:36,&quot;top&quot;:82.8,&quot;width&quot;:669.6}"/>
+</p:tagLst>
+</file>
+
+<file path=ppt/tags/tag138.xml><?xml version="1.0" encoding="utf-8"?>
+<p:tagLst xmlns:p="http://schemas.openxmlformats.org/presentationml/2006/main">
+  <p:tag name="KSO_WM_DIAGRAM_VIRTUALLY_FRAME" val="{&quot;height&quot;:201.6,&quot;left&quot;:36,&quot;top&quot;:82.8,&quot;width&quot;:669.6}"/>
+</p:tagLst>
+</file>
+
+<file path=ppt/tags/tag139.xml><?xml version="1.0" encoding="utf-8"?>
+<p:tagLst xmlns:p="http://schemas.openxmlformats.org/presentationml/2006/main">
+  <p:tag name="KSO_WM_DIAGRAM_VIRTUALLY_FRAME" val="{&quot;height&quot;:201.6,&quot;left&quot;:36,&quot;top&quot;:82.8,&quot;width&quot;:669.6}"/>
+</p:tagLst>
+</file>
+
 <file path=ppt/tags/tag14.xml><?xml version="1.0" encoding="utf-8"?>
 <p:tagLst xmlns:p="http://schemas.openxmlformats.org/presentationml/2006/main">
   <p:tag name="KSO_WM_DIAGRAM_VIRTUALLY_FRAME" val="{&quot;height&quot;:277.2,&quot;left&quot;:36,&quot;top&quot;:93.6,&quot;width&quot;:345.6}"/>
+</p:tagLst>
+</file>
+
+<file path=ppt/tags/tag140.xml><?xml version="1.0" encoding="utf-8"?>
+<p:tagLst xmlns:p="http://schemas.openxmlformats.org/presentationml/2006/main">
+  <p:tag name="KSO_WM_DIAGRAM_VIRTUALLY_FRAME" val="{&quot;height&quot;:201.6,&quot;left&quot;:36,&quot;top&quot;:82.8,&quot;width&quot;:669.6}"/>
+</p:tagLst>
+</file>
+
+<file path=ppt/tags/tag141.xml><?xml version="1.0" encoding="utf-8"?>
+<p:tagLst xmlns:p="http://schemas.openxmlformats.org/presentationml/2006/main">
+  <p:tag name="KSO_WM_DIAGRAM_VIRTUALLY_FRAME" val="{&quot;height&quot;:201.6,&quot;left&quot;:36,&quot;top&quot;:82.8,&quot;width&quot;:669.6}"/>
+</p:tagLst>
+</file>
+
+<file path=ppt/tags/tag142.xml><?xml version="1.0" encoding="utf-8"?>
+<p:tagLst xmlns:p="http://schemas.openxmlformats.org/presentationml/2006/main">
+  <p:tag name="KSO_WM_DIAGRAM_VIRTUALLY_FRAME" val="{&quot;height&quot;:201.6,&quot;left&quot;:36,&quot;top&quot;:82.8,&quot;width&quot;:669.6}"/>
+</p:tagLst>
+</file>
+
+<file path=ppt/tags/tag143.xml><?xml version="1.0" encoding="utf-8"?>
+<p:tagLst xmlns:p="http://schemas.openxmlformats.org/presentationml/2006/main">
+  <p:tag name="KSO_WM_DIAGRAM_VIRTUALLY_FRAME" val="{&quot;height&quot;:201.6,&quot;left&quot;:36,&quot;top&quot;:82.8,&quot;width&quot;:669.6}"/>
+</p:tagLst>
+</file>
+
+<file path=ppt/tags/tag144.xml><?xml version="1.0" encoding="utf-8"?>
+<p:tagLst xmlns:p="http://schemas.openxmlformats.org/presentationml/2006/main">
+  <p:tag name="KSO_WM_DIAGRAM_VIRTUALLY_FRAME" val="{&quot;height&quot;:201.6,&quot;left&quot;:36,&quot;top&quot;:82.8,&quot;width&quot;:669.6}"/>
+</p:tagLst>
+</file>
+
+<file path=ppt/tags/tag145.xml><?xml version="1.0" encoding="utf-8"?>
+<p:tagLst xmlns:p="http://schemas.openxmlformats.org/presentationml/2006/main">
+  <p:tag name="KSO_WM_DIAGRAM_VIRTUALLY_FRAME" val="{&quot;height&quot;:201.6,&quot;left&quot;:36,&quot;top&quot;:82.8,&quot;width&quot;:669.6}"/>
+</p:tagLst>
+</file>
+
+<file path=ppt/tags/tag146.xml><?xml version="1.0" encoding="utf-8"?>
+<p:tagLst xmlns:p="http://schemas.openxmlformats.org/presentationml/2006/main">
+  <p:tag name="KSO_WM_DIAGRAM_VIRTUALLY_FRAME" val="{&quot;height&quot;:201.6,&quot;left&quot;:36,&quot;top&quot;:82.8,&quot;width&quot;:669.6}"/>
+</p:tagLst>
+</file>
+
+<file path=ppt/tags/tag147.xml><?xml version="1.0" encoding="utf-8"?>
+<p:tagLst xmlns:p="http://schemas.openxmlformats.org/presentationml/2006/main">
+  <p:tag name="KSO_WM_DIAGRAM_VIRTUALLY_FRAME" val="{&quot;height&quot;:201.6,&quot;left&quot;:36,&quot;top&quot;:82.8,&quot;width&quot;:669.6}"/>
 </p:tagLst>
 </file>
 
@@ -19959,19 +20850,19 @@
 
 <file path=ppt/tags/tag27.xml><?xml version="1.0" encoding="utf-8"?>
 <p:tagLst xmlns:p="http://schemas.openxmlformats.org/presentationml/2006/main">
-  <p:tag name="KSO_WM_DIAGRAM_VIRTUALLY_FRAME" val="{&quot;height&quot;:309.6,&quot;left&quot;:22.6,&quot;top&quot;:82.8,&quot;width&quot;:731.35}"/>
+  <p:tag name="KSO_WM_DIAGRAM_VIRTUALLY_FRAME" val="{&quot;height&quot;:172.8,&quot;left&quot;:28.8,&quot;top&quot;:86.4,&quot;width&quot;:662.4}"/>
 </p:tagLst>
 </file>
 
 <file path=ppt/tags/tag28.xml><?xml version="1.0" encoding="utf-8"?>
 <p:tagLst xmlns:p="http://schemas.openxmlformats.org/presentationml/2006/main">
-  <p:tag name="KSO_WM_DIAGRAM_VIRTUALLY_FRAME" val="{&quot;height&quot;:309.6,&quot;left&quot;:22.6,&quot;top&quot;:82.8,&quot;width&quot;:731.35}"/>
+  <p:tag name="KSO_WM_DIAGRAM_VIRTUALLY_FRAME" val="{&quot;height&quot;:172.8,&quot;left&quot;:28.8,&quot;top&quot;:86.4,&quot;width&quot;:662.4}"/>
 </p:tagLst>
 </file>
 
 <file path=ppt/tags/tag29.xml><?xml version="1.0" encoding="utf-8"?>
 <p:tagLst xmlns:p="http://schemas.openxmlformats.org/presentationml/2006/main">
-  <p:tag name="KSO_WM_DIAGRAM_VIRTUALLY_FRAME" val="{&quot;height&quot;:309.6,&quot;left&quot;:22.6,&quot;top&quot;:82.8,&quot;width&quot;:731.35}"/>
+  <p:tag name="KSO_WM_DIAGRAM_VIRTUALLY_FRAME" val="{&quot;height&quot;:172.8,&quot;left&quot;:28.8,&quot;top&quot;:86.4,&quot;width&quot;:662.4}"/>
 </p:tagLst>
 </file>
 
@@ -19983,61 +20874,61 @@
 
 <file path=ppt/tags/tag30.xml><?xml version="1.0" encoding="utf-8"?>
 <p:tagLst xmlns:p="http://schemas.openxmlformats.org/presentationml/2006/main">
-  <p:tag name="KSO_WM_DIAGRAM_VIRTUALLY_FRAME" val="{&quot;height&quot;:309.6,&quot;left&quot;:22.6,&quot;top&quot;:82.8,&quot;width&quot;:731.35}"/>
+  <p:tag name="KSO_WM_DIAGRAM_VIRTUALLY_FRAME" val="{&quot;height&quot;:172.8,&quot;left&quot;:28.8,&quot;top&quot;:86.4,&quot;width&quot;:662.4}"/>
 </p:tagLst>
 </file>
 
 <file path=ppt/tags/tag31.xml><?xml version="1.0" encoding="utf-8"?>
 <p:tagLst xmlns:p="http://schemas.openxmlformats.org/presentationml/2006/main">
-  <p:tag name="KSO_WM_DIAGRAM_VIRTUALLY_FRAME" val="{&quot;height&quot;:309.6,&quot;left&quot;:22.6,&quot;top&quot;:82.8,&quot;width&quot;:731.35}"/>
+  <p:tag name="KSO_WM_DIAGRAM_VIRTUALLY_FRAME" val="{&quot;height&quot;:172.8,&quot;left&quot;:28.8,&quot;top&quot;:86.4,&quot;width&quot;:662.4}"/>
 </p:tagLst>
 </file>
 
 <file path=ppt/tags/tag32.xml><?xml version="1.0" encoding="utf-8"?>
 <p:tagLst xmlns:p="http://schemas.openxmlformats.org/presentationml/2006/main">
-  <p:tag name="KSO_WM_DIAGRAM_VIRTUALLY_FRAME" val="{&quot;height&quot;:309.6,&quot;left&quot;:22.6,&quot;top&quot;:82.8,&quot;width&quot;:731.35}"/>
+  <p:tag name="KSO_WM_DIAGRAM_VIRTUALLY_FRAME" val="{&quot;height&quot;:172.8,&quot;left&quot;:28.8,&quot;top&quot;:86.4,&quot;width&quot;:662.4}"/>
 </p:tagLst>
 </file>
 
 <file path=ppt/tags/tag33.xml><?xml version="1.0" encoding="utf-8"?>
 <p:tagLst xmlns:p="http://schemas.openxmlformats.org/presentationml/2006/main">
-  <p:tag name="KSO_WM_DIAGRAM_VIRTUALLY_FRAME" val="{&quot;height&quot;:309.6,&quot;left&quot;:22.6,&quot;top&quot;:82.8,&quot;width&quot;:731.35}"/>
+  <p:tag name="KSO_WM_DIAGRAM_VIRTUALLY_FRAME" val="{&quot;height&quot;:172.8,&quot;left&quot;:28.8,&quot;top&quot;:86.4,&quot;width&quot;:662.4}"/>
 </p:tagLst>
 </file>
 
 <file path=ppt/tags/tag34.xml><?xml version="1.0" encoding="utf-8"?>
 <p:tagLst xmlns:p="http://schemas.openxmlformats.org/presentationml/2006/main">
-  <p:tag name="KSO_WM_DIAGRAM_VIRTUALLY_FRAME" val="{&quot;height&quot;:309.6,&quot;left&quot;:22.6,&quot;top&quot;:82.8,&quot;width&quot;:731.35}"/>
+  <p:tag name="KSO_WM_DIAGRAM_VIRTUALLY_FRAME" val="{&quot;height&quot;:172.8,&quot;left&quot;:28.8,&quot;top&quot;:86.4,&quot;width&quot;:662.4}"/>
 </p:tagLst>
 </file>
 
 <file path=ppt/tags/tag35.xml><?xml version="1.0" encoding="utf-8"?>
 <p:tagLst xmlns:p="http://schemas.openxmlformats.org/presentationml/2006/main">
-  <p:tag name="KSO_WM_DIAGRAM_VIRTUALLY_FRAME" val="{&quot;height&quot;:309.6,&quot;left&quot;:22.6,&quot;top&quot;:82.8,&quot;width&quot;:731.35}"/>
+  <p:tag name="KSO_WM_DIAGRAM_VIRTUALLY_FRAME" val="{&quot;height&quot;:172.8,&quot;left&quot;:28.8,&quot;top&quot;:86.4,&quot;width&quot;:662.4}"/>
 </p:tagLst>
 </file>
 
 <file path=ppt/tags/tag36.xml><?xml version="1.0" encoding="utf-8"?>
 <p:tagLst xmlns:p="http://schemas.openxmlformats.org/presentationml/2006/main">
-  <p:tag name="KSO_WM_DIAGRAM_VIRTUALLY_FRAME" val="{&quot;height&quot;:309.6,&quot;left&quot;:22.6,&quot;top&quot;:82.8,&quot;width&quot;:731.35}"/>
+  <p:tag name="KSO_WM_DIAGRAM_VIRTUALLY_FRAME" val="{&quot;height&quot;:172.8,&quot;left&quot;:28.8,&quot;top&quot;:86.4,&quot;width&quot;:662.4}"/>
 </p:tagLst>
 </file>
 
 <file path=ppt/tags/tag37.xml><?xml version="1.0" encoding="utf-8"?>
 <p:tagLst xmlns:p="http://schemas.openxmlformats.org/presentationml/2006/main">
-  <p:tag name="KSO_WM_DIAGRAM_VIRTUALLY_FRAME" val="{&quot;height&quot;:309.6,&quot;left&quot;:22.6,&quot;top&quot;:82.8,&quot;width&quot;:731.35}"/>
+  <p:tag name="KSO_WM_DIAGRAM_VIRTUALLY_FRAME" val="{&quot;height&quot;:172.8,&quot;left&quot;:28.8,&quot;top&quot;:86.4,&quot;width&quot;:662.4}"/>
 </p:tagLst>
 </file>
 
 <file path=ppt/tags/tag38.xml><?xml version="1.0" encoding="utf-8"?>
 <p:tagLst xmlns:p="http://schemas.openxmlformats.org/presentationml/2006/main">
-  <p:tag name="KSO_WM_DIAGRAM_VIRTUALLY_FRAME" val="{&quot;height&quot;:309.6,&quot;left&quot;:22.6,&quot;top&quot;:82.8,&quot;width&quot;:731.35}"/>
+  <p:tag name="KSO_WM_DIAGRAM_VIRTUALLY_FRAME" val="{&quot;height&quot;:172.8,&quot;left&quot;:28.8,&quot;top&quot;:86.4,&quot;width&quot;:662.4}"/>
 </p:tagLst>
 </file>
 
 <file path=ppt/tags/tag39.xml><?xml version="1.0" encoding="utf-8"?>
 <p:tagLst xmlns:p="http://schemas.openxmlformats.org/presentationml/2006/main">
-  <p:tag name="KSO_WM_DIAGRAM_VIRTUALLY_FRAME" val="{&quot;height&quot;:309.6,&quot;left&quot;:22.6,&quot;top&quot;:82.8,&quot;width&quot;:731.35}"/>
+  <p:tag name="KSO_WM_DIAGRAM_VIRTUALLY_FRAME" val="{&quot;height&quot;:172.8,&quot;left&quot;:28.8,&quot;top&quot;:86.4,&quot;width&quot;:662.4}"/>
 </p:tagLst>
 </file>
 
@@ -20049,61 +20940,61 @@
 
 <file path=ppt/tags/tag40.xml><?xml version="1.0" encoding="utf-8"?>
 <p:tagLst xmlns:p="http://schemas.openxmlformats.org/presentationml/2006/main">
-  <p:tag name="KSO_WM_DIAGRAM_VIRTUALLY_FRAME" val="{&quot;height&quot;:309.6,&quot;left&quot;:22.6,&quot;top&quot;:82.8,&quot;width&quot;:731.35}"/>
+  <p:tag name="KSO_WM_DIAGRAM_VIRTUALLY_FRAME" val="{&quot;height&quot;:172.8,&quot;left&quot;:28.8,&quot;top&quot;:86.4,&quot;width&quot;:662.4}"/>
 </p:tagLst>
 </file>
 
 <file path=ppt/tags/tag41.xml><?xml version="1.0" encoding="utf-8"?>
 <p:tagLst xmlns:p="http://schemas.openxmlformats.org/presentationml/2006/main">
-  <p:tag name="KSO_WM_DIAGRAM_VIRTUALLY_FRAME" val="{&quot;height&quot;:309.6,&quot;left&quot;:22.6,&quot;top&quot;:82.8,&quot;width&quot;:731.35}"/>
+  <p:tag name="KSO_WM_DIAGRAM_VIRTUALLY_FRAME" val="{&quot;height&quot;:172.8,&quot;left&quot;:28.8,&quot;top&quot;:86.4,&quot;width&quot;:662.4}"/>
 </p:tagLst>
 </file>
 
 <file path=ppt/tags/tag42.xml><?xml version="1.0" encoding="utf-8"?>
 <p:tagLst xmlns:p="http://schemas.openxmlformats.org/presentationml/2006/main">
-  <p:tag name="KSO_WM_DIAGRAM_VIRTUALLY_FRAME" val="{&quot;height&quot;:309.6,&quot;left&quot;:22.6,&quot;top&quot;:82.8,&quot;width&quot;:731.35}"/>
+  <p:tag name="KSO_WM_DIAGRAM_VIRTUALLY_FRAME" val="{&quot;height&quot;:172.8,&quot;left&quot;:28.8,&quot;top&quot;:86.4,&quot;width&quot;:662.4}"/>
 </p:tagLst>
 </file>
 
 <file path=ppt/tags/tag43.xml><?xml version="1.0" encoding="utf-8"?>
 <p:tagLst xmlns:p="http://schemas.openxmlformats.org/presentationml/2006/main">
-  <p:tag name="KSO_WM_DIAGRAM_VIRTUALLY_FRAME" val="{&quot;height&quot;:309.6,&quot;left&quot;:22.6,&quot;top&quot;:82.8,&quot;width&quot;:731.35}"/>
+  <p:tag name="KSO_WM_DIAGRAM_VIRTUALLY_FRAME" val="{&quot;height&quot;:172.8,&quot;left&quot;:28.8,&quot;top&quot;:86.4,&quot;width&quot;:662.4}"/>
 </p:tagLst>
 </file>
 
 <file path=ppt/tags/tag44.xml><?xml version="1.0" encoding="utf-8"?>
 <p:tagLst xmlns:p="http://schemas.openxmlformats.org/presentationml/2006/main">
-  <p:tag name="KSO_WM_DIAGRAM_VIRTUALLY_FRAME" val="{&quot;height&quot;:309.6,&quot;left&quot;:36,&quot;top&quot;:82.8,&quot;width&quot;:648}"/>
+  <p:tag name="KSO_WM_DIAGRAM_VIRTUALLY_FRAME" val="{&quot;height&quot;:172.8,&quot;left&quot;:28.8,&quot;top&quot;:86.4,&quot;width&quot;:662.4}"/>
 </p:tagLst>
 </file>
 
 <file path=ppt/tags/tag45.xml><?xml version="1.0" encoding="utf-8"?>
 <p:tagLst xmlns:p="http://schemas.openxmlformats.org/presentationml/2006/main">
-  <p:tag name="KSO_WM_DIAGRAM_VIRTUALLY_FRAME" val="{&quot;height&quot;:309.6,&quot;left&quot;:36,&quot;top&quot;:82.8,&quot;width&quot;:648}"/>
+  <p:tag name="KSO_WM_DIAGRAM_VIRTUALLY_FRAME" val="{&quot;height&quot;:172.8,&quot;left&quot;:28.8,&quot;top&quot;:86.4,&quot;width&quot;:662.4}"/>
 </p:tagLst>
 </file>
 
 <file path=ppt/tags/tag46.xml><?xml version="1.0" encoding="utf-8"?>
 <p:tagLst xmlns:p="http://schemas.openxmlformats.org/presentationml/2006/main">
-  <p:tag name="KSO_WM_DIAGRAM_VIRTUALLY_FRAME" val="{&quot;height&quot;:309.6,&quot;left&quot;:36,&quot;top&quot;:82.8,&quot;width&quot;:648}"/>
+  <p:tag name="KSO_WM_DIAGRAM_VIRTUALLY_FRAME" val="{&quot;height&quot;:172.8,&quot;left&quot;:28.8,&quot;top&quot;:86.4,&quot;width&quot;:662.4}"/>
 </p:tagLst>
 </file>
 
 <file path=ppt/tags/tag47.xml><?xml version="1.0" encoding="utf-8"?>
 <p:tagLst xmlns:p="http://schemas.openxmlformats.org/presentationml/2006/main">
-  <p:tag name="KSO_WM_DIAGRAM_VIRTUALLY_FRAME" val="{&quot;height&quot;:309.6,&quot;left&quot;:36,&quot;top&quot;:82.8,&quot;width&quot;:648}"/>
+  <p:tag name="KSO_WM_DIAGRAM_VIRTUALLY_FRAME" val="{&quot;height&quot;:172.8,&quot;left&quot;:28.8,&quot;top&quot;:86.4,&quot;width&quot;:662.4}"/>
 </p:tagLst>
 </file>
 
 <file path=ppt/tags/tag48.xml><?xml version="1.0" encoding="utf-8"?>
 <p:tagLst xmlns:p="http://schemas.openxmlformats.org/presentationml/2006/main">
-  <p:tag name="KSO_WM_DIAGRAM_VIRTUALLY_FRAME" val="{&quot;height&quot;:309.6,&quot;left&quot;:36,&quot;top&quot;:82.8,&quot;width&quot;:648}"/>
+  <p:tag name="KSO_WM_DIAGRAM_VIRTUALLY_FRAME" val="{&quot;height&quot;:172.8,&quot;left&quot;:28.8,&quot;top&quot;:86.4,&quot;width&quot;:662.4}"/>
 </p:tagLst>
 </file>
 
 <file path=ppt/tags/tag49.xml><?xml version="1.0" encoding="utf-8"?>
 <p:tagLst xmlns:p="http://schemas.openxmlformats.org/presentationml/2006/main">
-  <p:tag name="KSO_WM_DIAGRAM_VIRTUALLY_FRAME" val="{&quot;height&quot;:309.6,&quot;left&quot;:36,&quot;top&quot;:82.8,&quot;width&quot;:648}"/>
+  <p:tag name="KSO_WM_DIAGRAM_VIRTUALLY_FRAME" val="{&quot;height&quot;:172.8,&quot;left&quot;:28.8,&quot;top&quot;:86.4,&quot;width&quot;:662.4}"/>
 </p:tagLst>
 </file>
 
@@ -20115,61 +21006,61 @@
 
 <file path=ppt/tags/tag50.xml><?xml version="1.0" encoding="utf-8"?>
 <p:tagLst xmlns:p="http://schemas.openxmlformats.org/presentationml/2006/main">
-  <p:tag name="KSO_WM_DIAGRAM_VIRTUALLY_FRAME" val="{&quot;height&quot;:309.6,&quot;left&quot;:36,&quot;top&quot;:82.8,&quot;width&quot;:648}"/>
+  <p:tag name="KSO_WM_DIAGRAM_VIRTUALLY_FRAME" val="{&quot;height&quot;:172.8,&quot;left&quot;:28.8,&quot;top&quot;:86.4,&quot;width&quot;:662.4}"/>
 </p:tagLst>
 </file>
 
 <file path=ppt/tags/tag51.xml><?xml version="1.0" encoding="utf-8"?>
 <p:tagLst xmlns:p="http://schemas.openxmlformats.org/presentationml/2006/main">
-  <p:tag name="KSO_WM_DIAGRAM_VIRTUALLY_FRAME" val="{&quot;height&quot;:309.6,&quot;left&quot;:36,&quot;top&quot;:82.8,&quot;width&quot;:648}"/>
+  <p:tag name="KSO_WM_DIAGRAM_VIRTUALLY_FRAME" val="{&quot;height&quot;:172.8,&quot;left&quot;:28.8,&quot;top&quot;:86.4,&quot;width&quot;:662.4}"/>
 </p:tagLst>
 </file>
 
 <file path=ppt/tags/tag52.xml><?xml version="1.0" encoding="utf-8"?>
 <p:tagLst xmlns:p="http://schemas.openxmlformats.org/presentationml/2006/main">
-  <p:tag name="KSO_WM_DIAGRAM_VIRTUALLY_FRAME" val="{&quot;height&quot;:309.6,&quot;left&quot;:36,&quot;top&quot;:82.8,&quot;width&quot;:648}"/>
+  <p:tag name="KSO_WM_DIAGRAM_VIRTUALLY_FRAME" val="{&quot;height&quot;:172.8,&quot;left&quot;:28.8,&quot;top&quot;:86.4,&quot;width&quot;:662.4}"/>
 </p:tagLst>
 </file>
 
 <file path=ppt/tags/tag53.xml><?xml version="1.0" encoding="utf-8"?>
 <p:tagLst xmlns:p="http://schemas.openxmlformats.org/presentationml/2006/main">
-  <p:tag name="KSO_WM_DIAGRAM_VIRTUALLY_FRAME" val="{&quot;height&quot;:309.6,&quot;left&quot;:36,&quot;top&quot;:82.8,&quot;width&quot;:648}"/>
+  <p:tag name="KSO_WM_DIAGRAM_VIRTUALLY_FRAME" val="{&quot;height&quot;:172.8,&quot;left&quot;:28.8,&quot;top&quot;:86.4,&quot;width&quot;:662.4}"/>
 </p:tagLst>
 </file>
 
 <file path=ppt/tags/tag54.xml><?xml version="1.0" encoding="utf-8"?>
 <p:tagLst xmlns:p="http://schemas.openxmlformats.org/presentationml/2006/main">
-  <p:tag name="KSO_WM_DIAGRAM_VIRTUALLY_FRAME" val="{&quot;height&quot;:309.6,&quot;left&quot;:36,&quot;top&quot;:82.8,&quot;width&quot;:648}"/>
+  <p:tag name="KSO_WM_DIAGRAM_VIRTUALLY_FRAME" val="{&quot;height&quot;:172.8,&quot;left&quot;:28.8,&quot;top&quot;:86.4,&quot;width&quot;:662.4}"/>
 </p:tagLst>
 </file>
 
 <file path=ppt/tags/tag55.xml><?xml version="1.0" encoding="utf-8"?>
 <p:tagLst xmlns:p="http://schemas.openxmlformats.org/presentationml/2006/main">
-  <p:tag name="KSO_WM_DIAGRAM_VIRTUALLY_FRAME" val="{&quot;height&quot;:309.6,&quot;left&quot;:36,&quot;top&quot;:82.8,&quot;width&quot;:648}"/>
+  <p:tag name="KSO_WM_DIAGRAM_VIRTUALLY_FRAME" val="{&quot;height&quot;:309.6,&quot;left&quot;:22.6,&quot;top&quot;:82.8,&quot;width&quot;:731.35}"/>
 </p:tagLst>
 </file>
 
 <file path=ppt/tags/tag56.xml><?xml version="1.0" encoding="utf-8"?>
 <p:tagLst xmlns:p="http://schemas.openxmlformats.org/presentationml/2006/main">
-  <p:tag name="KSO_WM_DIAGRAM_VIRTUALLY_FRAME" val="{&quot;height&quot;:309.6,&quot;left&quot;:36,&quot;top&quot;:82.8,&quot;width&quot;:648}"/>
+  <p:tag name="KSO_WM_DIAGRAM_VIRTUALLY_FRAME" val="{&quot;height&quot;:309.6,&quot;left&quot;:22.6,&quot;top&quot;:82.8,&quot;width&quot;:731.35}"/>
 </p:tagLst>
 </file>
 
 <file path=ppt/tags/tag57.xml><?xml version="1.0" encoding="utf-8"?>
 <p:tagLst xmlns:p="http://schemas.openxmlformats.org/presentationml/2006/main">
-  <p:tag name="KSO_WM_DIAGRAM_VIRTUALLY_FRAME" val="{&quot;height&quot;:309.6,&quot;left&quot;:36,&quot;top&quot;:82.8,&quot;width&quot;:648}"/>
+  <p:tag name="KSO_WM_DIAGRAM_VIRTUALLY_FRAME" val="{&quot;height&quot;:309.6,&quot;left&quot;:22.6,&quot;top&quot;:82.8,&quot;width&quot;:731.35}"/>
 </p:tagLst>
 </file>
 
 <file path=ppt/tags/tag58.xml><?xml version="1.0" encoding="utf-8"?>
 <p:tagLst xmlns:p="http://schemas.openxmlformats.org/presentationml/2006/main">
-  <p:tag name="KSO_WM_DIAGRAM_VIRTUALLY_FRAME" val="{&quot;height&quot;:309.6,&quot;left&quot;:36,&quot;top&quot;:82.8,&quot;width&quot;:648}"/>
+  <p:tag name="KSO_WM_DIAGRAM_VIRTUALLY_FRAME" val="{&quot;height&quot;:309.6,&quot;left&quot;:22.6,&quot;top&quot;:82.8,&quot;width&quot;:731.35}"/>
 </p:tagLst>
 </file>
 
 <file path=ppt/tags/tag59.xml><?xml version="1.0" encoding="utf-8"?>
 <p:tagLst xmlns:p="http://schemas.openxmlformats.org/presentationml/2006/main">
-  <p:tag name="KSO_WM_DIAGRAM_VIRTUALLY_FRAME" val="{&quot;height&quot;:309.6,&quot;left&quot;:36,&quot;top&quot;:82.8,&quot;width&quot;:648}"/>
+  <p:tag name="KSO_WM_DIAGRAM_VIRTUALLY_FRAME" val="{&quot;height&quot;:309.6,&quot;left&quot;:22.6,&quot;top&quot;:82.8,&quot;width&quot;:731.35}"/>
 </p:tagLst>
 </file>
 
@@ -20181,61 +21072,61 @@
 
 <file path=ppt/tags/tag60.xml><?xml version="1.0" encoding="utf-8"?>
 <p:tagLst xmlns:p="http://schemas.openxmlformats.org/presentationml/2006/main">
-  <p:tag name="KSO_WM_DIAGRAM_VIRTUALLY_FRAME" val="{&quot;height&quot;:291.6,&quot;left&quot;:36,&quot;top&quot;:82.8,&quot;width&quot;:669.6}"/>
+  <p:tag name="KSO_WM_DIAGRAM_VIRTUALLY_FRAME" val="{&quot;height&quot;:309.6,&quot;left&quot;:22.6,&quot;top&quot;:82.8,&quot;width&quot;:731.35}"/>
 </p:tagLst>
 </file>
 
 <file path=ppt/tags/tag61.xml><?xml version="1.0" encoding="utf-8"?>
 <p:tagLst xmlns:p="http://schemas.openxmlformats.org/presentationml/2006/main">
-  <p:tag name="KSO_WM_DIAGRAM_VIRTUALLY_FRAME" val="{&quot;height&quot;:291.6,&quot;left&quot;:36,&quot;top&quot;:82.8,&quot;width&quot;:669.6}"/>
+  <p:tag name="KSO_WM_DIAGRAM_VIRTUALLY_FRAME" val="{&quot;height&quot;:309.6,&quot;left&quot;:22.6,&quot;top&quot;:82.8,&quot;width&quot;:731.35}"/>
 </p:tagLst>
 </file>
 
 <file path=ppt/tags/tag62.xml><?xml version="1.0" encoding="utf-8"?>
 <p:tagLst xmlns:p="http://schemas.openxmlformats.org/presentationml/2006/main">
-  <p:tag name="KSO_WM_DIAGRAM_VIRTUALLY_FRAME" val="{&quot;height&quot;:291.6,&quot;left&quot;:36,&quot;top&quot;:82.8,&quot;width&quot;:669.6}"/>
+  <p:tag name="KSO_WM_DIAGRAM_VIRTUALLY_FRAME" val="{&quot;height&quot;:309.6,&quot;left&quot;:22.6,&quot;top&quot;:82.8,&quot;width&quot;:731.35}"/>
 </p:tagLst>
 </file>
 
 <file path=ppt/tags/tag63.xml><?xml version="1.0" encoding="utf-8"?>
 <p:tagLst xmlns:p="http://schemas.openxmlformats.org/presentationml/2006/main">
-  <p:tag name="KSO_WM_DIAGRAM_VIRTUALLY_FRAME" val="{&quot;height&quot;:291.6,&quot;left&quot;:36,&quot;top&quot;:82.8,&quot;width&quot;:669.6}"/>
+  <p:tag name="KSO_WM_DIAGRAM_VIRTUALLY_FRAME" val="{&quot;height&quot;:309.6,&quot;left&quot;:22.6,&quot;top&quot;:82.8,&quot;width&quot;:731.35}"/>
 </p:tagLst>
 </file>
 
 <file path=ppt/tags/tag64.xml><?xml version="1.0" encoding="utf-8"?>
 <p:tagLst xmlns:p="http://schemas.openxmlformats.org/presentationml/2006/main">
-  <p:tag name="KSO_WM_DIAGRAM_VIRTUALLY_FRAME" val="{&quot;height&quot;:291.6,&quot;left&quot;:36,&quot;top&quot;:82.8,&quot;width&quot;:669.6}"/>
+  <p:tag name="KSO_WM_DIAGRAM_VIRTUALLY_FRAME" val="{&quot;height&quot;:309.6,&quot;left&quot;:22.6,&quot;top&quot;:82.8,&quot;width&quot;:731.35}"/>
 </p:tagLst>
 </file>
 
 <file path=ppt/tags/tag65.xml><?xml version="1.0" encoding="utf-8"?>
 <p:tagLst xmlns:p="http://schemas.openxmlformats.org/presentationml/2006/main">
-  <p:tag name="KSO_WM_DIAGRAM_VIRTUALLY_FRAME" val="{&quot;height&quot;:291.6,&quot;left&quot;:36,&quot;top&quot;:82.8,&quot;width&quot;:669.6}"/>
+  <p:tag name="KSO_WM_DIAGRAM_VIRTUALLY_FRAME" val="{&quot;height&quot;:309.6,&quot;left&quot;:22.6,&quot;top&quot;:82.8,&quot;width&quot;:731.35}"/>
 </p:tagLst>
 </file>
 
 <file path=ppt/tags/tag66.xml><?xml version="1.0" encoding="utf-8"?>
 <p:tagLst xmlns:p="http://schemas.openxmlformats.org/presentationml/2006/main">
-  <p:tag name="KSO_WM_DIAGRAM_VIRTUALLY_FRAME" val="{&quot;height&quot;:291.6,&quot;left&quot;:36,&quot;top&quot;:82.8,&quot;width&quot;:669.6}"/>
+  <p:tag name="KSO_WM_DIAGRAM_VIRTUALLY_FRAME" val="{&quot;height&quot;:309.6,&quot;left&quot;:22.6,&quot;top&quot;:82.8,&quot;width&quot;:731.35}"/>
 </p:tagLst>
 </file>
 
 <file path=ppt/tags/tag67.xml><?xml version="1.0" encoding="utf-8"?>
 <p:tagLst xmlns:p="http://schemas.openxmlformats.org/presentationml/2006/main">
-  <p:tag name="KSO_WM_DIAGRAM_VIRTUALLY_FRAME" val="{&quot;height&quot;:291.6,&quot;left&quot;:36,&quot;top&quot;:82.8,&quot;width&quot;:669.6}"/>
+  <p:tag name="KSO_WM_DIAGRAM_VIRTUALLY_FRAME" val="{&quot;height&quot;:309.6,&quot;left&quot;:22.6,&quot;top&quot;:82.8,&quot;width&quot;:731.35}"/>
 </p:tagLst>
 </file>
 
 <file path=ppt/tags/tag68.xml><?xml version="1.0" encoding="utf-8"?>
 <p:tagLst xmlns:p="http://schemas.openxmlformats.org/presentationml/2006/main">
-  <p:tag name="KSO_WM_DIAGRAM_VIRTUALLY_FRAME" val="{&quot;height&quot;:291.6,&quot;left&quot;:36,&quot;top&quot;:82.8,&quot;width&quot;:669.6}"/>
+  <p:tag name="KSO_WM_DIAGRAM_VIRTUALLY_FRAME" val="{&quot;height&quot;:309.6,&quot;left&quot;:22.6,&quot;top&quot;:82.8,&quot;width&quot;:731.35}"/>
 </p:tagLst>
 </file>
 
 <file path=ppt/tags/tag69.xml><?xml version="1.0" encoding="utf-8"?>
 <p:tagLst xmlns:p="http://schemas.openxmlformats.org/presentationml/2006/main">
-  <p:tag name="KSO_WM_DIAGRAM_VIRTUALLY_FRAME" val="{&quot;height&quot;:291.6,&quot;left&quot;:36,&quot;top&quot;:82.8,&quot;width&quot;:669.6}"/>
+  <p:tag name="KSO_WM_DIAGRAM_VIRTUALLY_FRAME" val="{&quot;height&quot;:309.6,&quot;left&quot;:22.6,&quot;top&quot;:82.8,&quot;width&quot;:731.35}"/>
 </p:tagLst>
 </file>
 
@@ -20247,61 +21138,61 @@
 
 <file path=ppt/tags/tag70.xml><?xml version="1.0" encoding="utf-8"?>
 <p:tagLst xmlns:p="http://schemas.openxmlformats.org/presentationml/2006/main">
-  <p:tag name="KSO_WM_DIAGRAM_VIRTUALLY_FRAME" val="{&quot;height&quot;:291.6,&quot;left&quot;:36,&quot;top&quot;:82.8,&quot;width&quot;:669.6}"/>
+  <p:tag name="KSO_WM_DIAGRAM_VIRTUALLY_FRAME" val="{&quot;height&quot;:309.6,&quot;left&quot;:22.6,&quot;top&quot;:82.8,&quot;width&quot;:731.35}"/>
 </p:tagLst>
 </file>
 
 <file path=ppt/tags/tag71.xml><?xml version="1.0" encoding="utf-8"?>
 <p:tagLst xmlns:p="http://schemas.openxmlformats.org/presentationml/2006/main">
-  <p:tag name="KSO_WM_DIAGRAM_VIRTUALLY_FRAME" val="{&quot;height&quot;:291.6,&quot;left&quot;:36,&quot;top&quot;:82.8,&quot;width&quot;:669.6}"/>
+  <p:tag name="KSO_WM_DIAGRAM_VIRTUALLY_FRAME" val="{&quot;height&quot;:309.6,&quot;left&quot;:22.6,&quot;top&quot;:82.8,&quot;width&quot;:731.35}"/>
 </p:tagLst>
 </file>
 
 <file path=ppt/tags/tag72.xml><?xml version="1.0" encoding="utf-8"?>
 <p:tagLst xmlns:p="http://schemas.openxmlformats.org/presentationml/2006/main">
-  <p:tag name="KSO_WM_DIAGRAM_VIRTUALLY_FRAME" val="{&quot;height&quot;:291.6,&quot;left&quot;:36,&quot;top&quot;:82.8,&quot;width&quot;:669.6}"/>
+  <p:tag name="KSO_WM_DIAGRAM_VIRTUALLY_FRAME" val="{&quot;height&quot;:309.6,&quot;left&quot;:36,&quot;top&quot;:82.8,&quot;width&quot;:648}"/>
 </p:tagLst>
 </file>
 
 <file path=ppt/tags/tag73.xml><?xml version="1.0" encoding="utf-8"?>
 <p:tagLst xmlns:p="http://schemas.openxmlformats.org/presentationml/2006/main">
-  <p:tag name="KSO_WM_DIAGRAM_VIRTUALLY_FRAME" val="{&quot;height&quot;:291.6,&quot;left&quot;:36,&quot;top&quot;:82.8,&quot;width&quot;:669.6}"/>
+  <p:tag name="KSO_WM_DIAGRAM_VIRTUALLY_FRAME" val="{&quot;height&quot;:309.6,&quot;left&quot;:36,&quot;top&quot;:82.8,&quot;width&quot;:648}"/>
 </p:tagLst>
 </file>
 
 <file path=ppt/tags/tag74.xml><?xml version="1.0" encoding="utf-8"?>
 <p:tagLst xmlns:p="http://schemas.openxmlformats.org/presentationml/2006/main">
-  <p:tag name="KSO_WM_DIAGRAM_VIRTUALLY_FRAME" val="{&quot;height&quot;:291.6,&quot;left&quot;:36,&quot;top&quot;:82.8,&quot;width&quot;:669.6}"/>
+  <p:tag name="KSO_WM_DIAGRAM_VIRTUALLY_FRAME" val="{&quot;height&quot;:309.6,&quot;left&quot;:36,&quot;top&quot;:82.8,&quot;width&quot;:648}"/>
 </p:tagLst>
 </file>
 
 <file path=ppt/tags/tag75.xml><?xml version="1.0" encoding="utf-8"?>
 <p:tagLst xmlns:p="http://schemas.openxmlformats.org/presentationml/2006/main">
-  <p:tag name="KSO_WM_DIAGRAM_VIRTUALLY_FRAME" val="{&quot;height&quot;:291.6,&quot;left&quot;:36,&quot;top&quot;:82.8,&quot;width&quot;:669.6}"/>
+  <p:tag name="KSO_WM_DIAGRAM_VIRTUALLY_FRAME" val="{&quot;height&quot;:309.6,&quot;left&quot;:36,&quot;top&quot;:82.8,&quot;width&quot;:648}"/>
 </p:tagLst>
 </file>
 
 <file path=ppt/tags/tag76.xml><?xml version="1.0" encoding="utf-8"?>
 <p:tagLst xmlns:p="http://schemas.openxmlformats.org/presentationml/2006/main">
-  <p:tag name="KSO_WM_DIAGRAM_VIRTUALLY_FRAME" val="{&quot;height&quot;:291.6,&quot;left&quot;:36,&quot;top&quot;:82.8,&quot;width&quot;:669.6}"/>
+  <p:tag name="KSO_WM_DIAGRAM_VIRTUALLY_FRAME" val="{&quot;height&quot;:309.6,&quot;left&quot;:36,&quot;top&quot;:82.8,&quot;width&quot;:648}"/>
 </p:tagLst>
 </file>
 
 <file path=ppt/tags/tag77.xml><?xml version="1.0" encoding="utf-8"?>
 <p:tagLst xmlns:p="http://schemas.openxmlformats.org/presentationml/2006/main">
-  <p:tag name="KSO_WM_DIAGRAM_VIRTUALLY_FRAME" val="{&quot;height&quot;:291.6,&quot;left&quot;:36,&quot;top&quot;:82.8,&quot;width&quot;:669.6}"/>
+  <p:tag name="KSO_WM_DIAGRAM_VIRTUALLY_FRAME" val="{&quot;height&quot;:309.6,&quot;left&quot;:36,&quot;top&quot;:82.8,&quot;width&quot;:648}"/>
 </p:tagLst>
 </file>
 
 <file path=ppt/tags/tag78.xml><?xml version="1.0" encoding="utf-8"?>
 <p:tagLst xmlns:p="http://schemas.openxmlformats.org/presentationml/2006/main">
-  <p:tag name="KSO_WM_DIAGRAM_VIRTUALLY_FRAME" val="{&quot;height&quot;:291.6,&quot;left&quot;:36,&quot;top&quot;:82.8,&quot;width&quot;:669.6}"/>
+  <p:tag name="KSO_WM_DIAGRAM_VIRTUALLY_FRAME" val="{&quot;height&quot;:309.6,&quot;left&quot;:36,&quot;top&quot;:82.8,&quot;width&quot;:648}"/>
 </p:tagLst>
 </file>
 
 <file path=ppt/tags/tag79.xml><?xml version="1.0" encoding="utf-8"?>
 <p:tagLst xmlns:p="http://schemas.openxmlformats.org/presentationml/2006/main">
-  <p:tag name="KSO_WM_DIAGRAM_VIRTUALLY_FRAME" val="{&quot;height&quot;:291.6,&quot;left&quot;:36,&quot;top&quot;:82.8,&quot;width&quot;:669.6}"/>
+  <p:tag name="KSO_WM_DIAGRAM_VIRTUALLY_FRAME" val="{&quot;height&quot;:309.6,&quot;left&quot;:36,&quot;top&quot;:82.8,&quot;width&quot;:648}"/>
 </p:tagLst>
 </file>
 
@@ -20313,49 +21204,49 @@
 
 <file path=ppt/tags/tag80.xml><?xml version="1.0" encoding="utf-8"?>
 <p:tagLst xmlns:p="http://schemas.openxmlformats.org/presentationml/2006/main">
-  <p:tag name="KSO_WM_DIAGRAM_VIRTUALLY_FRAME" val="{&quot;height&quot;:291.6,&quot;left&quot;:36,&quot;top&quot;:82.8,&quot;width&quot;:669.6}"/>
+  <p:tag name="KSO_WM_DIAGRAM_VIRTUALLY_FRAME" val="{&quot;height&quot;:309.6,&quot;left&quot;:36,&quot;top&quot;:82.8,&quot;width&quot;:648}"/>
 </p:tagLst>
 </file>
 
 <file path=ppt/tags/tag81.xml><?xml version="1.0" encoding="utf-8"?>
 <p:tagLst xmlns:p="http://schemas.openxmlformats.org/presentationml/2006/main">
-  <p:tag name="KSO_WM_DIAGRAM_VIRTUALLY_FRAME" val="{&quot;height&quot;:291.6,&quot;left&quot;:36,&quot;top&quot;:82.8,&quot;width&quot;:669.6}"/>
+  <p:tag name="KSO_WM_DIAGRAM_VIRTUALLY_FRAME" val="{&quot;height&quot;:309.6,&quot;left&quot;:36,&quot;top&quot;:82.8,&quot;width&quot;:648}"/>
 </p:tagLst>
 </file>
 
 <file path=ppt/tags/tag82.xml><?xml version="1.0" encoding="utf-8"?>
 <p:tagLst xmlns:p="http://schemas.openxmlformats.org/presentationml/2006/main">
-  <p:tag name="KSO_WM_DIAGRAM_VIRTUALLY_FRAME" val="{&quot;height&quot;:291.6,&quot;left&quot;:36,&quot;top&quot;:82.8,&quot;width&quot;:669.6}"/>
+  <p:tag name="KSO_WM_DIAGRAM_VIRTUALLY_FRAME" val="{&quot;height&quot;:309.6,&quot;left&quot;:36,&quot;top&quot;:82.8,&quot;width&quot;:648}"/>
 </p:tagLst>
 </file>
 
 <file path=ppt/tags/tag83.xml><?xml version="1.0" encoding="utf-8"?>
 <p:tagLst xmlns:p="http://schemas.openxmlformats.org/presentationml/2006/main">
-  <p:tag name="KSO_WM_DIAGRAM_VIRTUALLY_FRAME" val="{&quot;height&quot;:291.6,&quot;left&quot;:36,&quot;top&quot;:82.8,&quot;width&quot;:669.6}"/>
+  <p:tag name="KSO_WM_DIAGRAM_VIRTUALLY_FRAME" val="{&quot;height&quot;:309.6,&quot;left&quot;:36,&quot;top&quot;:82.8,&quot;width&quot;:648}"/>
 </p:tagLst>
 </file>
 
 <file path=ppt/tags/tag84.xml><?xml version="1.0" encoding="utf-8"?>
 <p:tagLst xmlns:p="http://schemas.openxmlformats.org/presentationml/2006/main">
-  <p:tag name="KSO_WM_DIAGRAM_VIRTUALLY_FRAME" val="{&quot;height&quot;:291.6,&quot;left&quot;:36,&quot;top&quot;:82.8,&quot;width&quot;:669.6}"/>
+  <p:tag name="KSO_WM_DIAGRAM_VIRTUALLY_FRAME" val="{&quot;height&quot;:309.6,&quot;left&quot;:36,&quot;top&quot;:82.8,&quot;width&quot;:648}"/>
 </p:tagLst>
 </file>
 
 <file path=ppt/tags/tag85.xml><?xml version="1.0" encoding="utf-8"?>
 <p:tagLst xmlns:p="http://schemas.openxmlformats.org/presentationml/2006/main">
-  <p:tag name="KSO_WM_DIAGRAM_VIRTUALLY_FRAME" val="{&quot;height&quot;:291.6,&quot;left&quot;:36,&quot;top&quot;:82.8,&quot;width&quot;:669.6}"/>
+  <p:tag name="KSO_WM_DIAGRAM_VIRTUALLY_FRAME" val="{&quot;height&quot;:309.6,&quot;left&quot;:36,&quot;top&quot;:82.8,&quot;width&quot;:648}"/>
 </p:tagLst>
 </file>
 
 <file path=ppt/tags/tag86.xml><?xml version="1.0" encoding="utf-8"?>
 <p:tagLst xmlns:p="http://schemas.openxmlformats.org/presentationml/2006/main">
-  <p:tag name="KSO_WM_DIAGRAM_VIRTUALLY_FRAME" val="{&quot;height&quot;:291.6,&quot;left&quot;:36,&quot;top&quot;:82.8,&quot;width&quot;:669.6}"/>
+  <p:tag name="KSO_WM_DIAGRAM_VIRTUALLY_FRAME" val="{&quot;height&quot;:309.6,&quot;left&quot;:36,&quot;top&quot;:82.8,&quot;width&quot;:648}"/>
 </p:tagLst>
 </file>
 
 <file path=ppt/tags/tag87.xml><?xml version="1.0" encoding="utf-8"?>
 <p:tagLst xmlns:p="http://schemas.openxmlformats.org/presentationml/2006/main">
-  <p:tag name="KSO_WM_DIAGRAM_VIRTUALLY_FRAME" val="{&quot;height&quot;:291.6,&quot;left&quot;:36,&quot;top&quot;:82.8,&quot;width&quot;:669.6}"/>
+  <p:tag name="KSO_WM_DIAGRAM_VIRTUALLY_FRAME" val="{&quot;height&quot;:309.6,&quot;left&quot;:36,&quot;top&quot;:82.8,&quot;width&quot;:648}"/>
 </p:tagLst>
 </file>
 
@@ -20408,6 +21299,30 @@
 </file>
 
 <file path=ppt/tags/tag95.xml><?xml version="1.0" encoding="utf-8"?>
+<p:tagLst xmlns:p="http://schemas.openxmlformats.org/presentationml/2006/main">
+  <p:tag name="KSO_WM_DIAGRAM_VIRTUALLY_FRAME" val="{&quot;height&quot;:291.6,&quot;left&quot;:36,&quot;top&quot;:82.8,&quot;width&quot;:669.6}"/>
+</p:tagLst>
+</file>
+
+<file path=ppt/tags/tag96.xml><?xml version="1.0" encoding="utf-8"?>
+<p:tagLst xmlns:p="http://schemas.openxmlformats.org/presentationml/2006/main">
+  <p:tag name="KSO_WM_DIAGRAM_VIRTUALLY_FRAME" val="{&quot;height&quot;:291.6,&quot;left&quot;:36,&quot;top&quot;:82.8,&quot;width&quot;:669.6}"/>
+</p:tagLst>
+</file>
+
+<file path=ppt/tags/tag97.xml><?xml version="1.0" encoding="utf-8"?>
+<p:tagLst xmlns:p="http://schemas.openxmlformats.org/presentationml/2006/main">
+  <p:tag name="KSO_WM_DIAGRAM_VIRTUALLY_FRAME" val="{&quot;height&quot;:291.6,&quot;left&quot;:36,&quot;top&quot;:82.8,&quot;width&quot;:669.6}"/>
+</p:tagLst>
+</file>
+
+<file path=ppt/tags/tag98.xml><?xml version="1.0" encoding="utf-8"?>
+<p:tagLst xmlns:p="http://schemas.openxmlformats.org/presentationml/2006/main">
+  <p:tag name="KSO_WM_DIAGRAM_VIRTUALLY_FRAME" val="{&quot;height&quot;:291.6,&quot;left&quot;:36,&quot;top&quot;:82.8,&quot;width&quot;:669.6}"/>
+</p:tagLst>
+</file>
+
+<file path=ppt/tags/tag99.xml><?xml version="1.0" encoding="utf-8"?>
 <p:tagLst xmlns:p="http://schemas.openxmlformats.org/presentationml/2006/main">
   <p:tag name="KSO_WM_DIAGRAM_VIRTUALLY_FRAME" val="{&quot;height&quot;:291.6,&quot;left&quot;:36,&quot;top&quot;:82.8,&quot;width&quot;:669.6}"/>
 </p:tagLst>
